--- a/docs/AdvisAR-Hackathon-Deck.pptx
+++ b/docs/AdvisAR-Hackathon-Deck.pptx
@@ -505,17 +505,22 @@
           <a:lstStyle/>
           <a:p>
             <a:r>
-              <a:t>Northstar Global Health is our health system: about 600 applications, SaaS and AI tools, and a</a:t>
-            </a:r>
-          </a:p>
-          <a:p>
-            <a:r>
-              <a:t>CIO under pressure to take cost out of technology without breaking a clinical workflow that</a:t>
-            </a:r>
-          </a:p>
-          <a:p>
-            <a:r>
-              <a:t>somebody depends on.</a:t>
+              <a:t>Northstar Global Health is our health system: 600 applications, SaaS and AI tools, and a CIO under</a:t>
+            </a:r>
+          </a:p>
+          <a:p>
+            <a:r>
+              <a:t>pressure to take cost out of technology without breaking a clinical workflow that somebody depends</a:t>
+            </a:r>
+          </a:p>
+          <a:p>
+            <a:r>
+              <a:t>on. And 600 is not a number we are waving at - we scored all six hundred of them end to end, in one</a:t>
+            </a:r>
+          </a:p>
+          <a:p>
+            <a:r>
+              <a:t>run, and you will see what came out on the impact slide.</a:t>
             </a:r>
           </a:p>
           <a:p/>
@@ -1021,58 +1026,223 @@
           </a:p>
           <a:p>
             <a:r>
-              <a:t>package manager, nothing to compile. The scoring run points at its source workbook through one</a:t>
-            </a:r>
-          </a:p>
-          <a:p>
-            <a:r>
-              <a:t>constant at the top of the file. Output is a nine-sheet workbook, including a sanity-checks sheet</a:t>
-            </a:r>
-          </a:p>
-          <a:p>
-            <a:r>
-              <a:t>and a sheet comparing our dispositions against the client's own labels - which is how we found</a:t>
-            </a:r>
-          </a:p>
-          <a:p>
-            <a:r>
-              <a:t>the places we disagree with her, and why.</a:t>
+              <a:t>package manager, nothing to compile. That command-line engine stays the reference implementation -</a:t>
+            </a:r>
+          </a:p>
+          <a:p>
+            <a:r>
+              <a:t>if the browser and the engine ever disagree, the engine is right by definition. Output is a</a:t>
+            </a:r>
+          </a:p>
+          <a:p>
+            <a:r>
+              <a:t>nine-sheet workbook, including a sanity-checks sheet and a sheet comparing our dispositions</a:t>
+            </a:r>
+          </a:p>
+          <a:p>
+            <a:r>
+              <a:t>against the client's own labels, which is how we found the places we disagree with her, and why.</a:t>
             </a:r>
           </a:p>
           <a:p/>
           <a:p>
             <a:r>
-              <a:t>On the UI, and I want to be straight about this: it is at hack-team-12.vercel.app and it shows</a:t>
-            </a:r>
-          </a:p>
-          <a:p>
-            <a:r>
-              <a:t>the three views a CIO works in - executive overview, the workbench with the evidence rail, and</a:t>
-            </a:r>
-          </a:p>
-          <a:p>
-            <a:r>
-              <a:t>the full decision detail for a single application. It is a wireframe on illustrative data.</a:t>
-            </a:r>
-          </a:p>
-          <a:p>
-            <a:r>
-              <a:t>Navigation, the cluster review buttons, selecting an application to load its evidence, and the</a:t>
-            </a:r>
-          </a:p>
-          <a:p>
-            <a:r>
-              <a:t>analyze action work. Upload inventory and export decisions are not wired, and we left them</a:t>
-            </a:r>
-          </a:p>
-          <a:p>
-            <a:r>
-              <a:t>visibly inert rather than faking them. The scored numbers you have seen come from the engine, not</a:t>
-            </a:r>
-          </a:p>
-          <a:p>
-            <a:r>
-              <a:t>from the page.</a:t>
+              <a:t>Then we ran the same engine, unmodified, over a six-hundred-application portfolio. Seconds, not</a:t>
+            </a:r>
+          </a:p>
+          <a:p>
+            <a:r>
+              <a:t>weeks: the scoring step is a shade over two seconds, and about seven end to end including writing</a:t>
+            </a:r>
+          </a:p>
+          <a:p>
+            <a:r>
+              <a:t>every output workbook. Treat that as an order of magnitude rather than a benchmark - it is a</a:t>
+            </a:r>
+          </a:p>
+          <a:p>
+            <a:r>
+              <a:t>laptop-class measurement and the committed summary from a slower machine records nine and a</a:t>
+            </a:r>
+          </a:p>
+          <a:p>
+            <a:r>
+              <a:t>quarter seconds end to end. The important half of that run is the regression: the twenty</a:t>
+            </a:r>
+          </a:p>
+          <a:p>
+            <a:r>
+              <a:t>applications shared with the walkthrough came out of the six hundred with exactly the same</a:t>
+            </a:r>
+          </a:p>
+          <a:p>
+            <a:r>
+              <a:t>dispositions, none moved.</a:t>
+            </a:r>
+          </a:p>
+          <a:p/>
+          <a:p>
+            <a:r>
+              <a:t>Now the web app, and here is what is real. Upload inventory opens a genuine file dialogue that</a:t>
+            </a:r>
+          </a:p>
+          <a:p>
+            <a:r>
+              <a:t>accepts .xlsx and .csv. Analyze portfolio scores that file in the browser and rewrites the page</a:t>
+            </a:r>
+          </a:p>
+          <a:p>
+            <a:r>
+              <a:t>from it - the headline figures, the savings bars, the decision mix, the guardrail counts, the</a:t>
+            </a:r>
+          </a:p>
+          <a:p>
+            <a:r>
+              <a:t>redundancy clusters, and the workbench table, where clicking a row opens the evidence rail rebuilt</a:t>
+            </a:r>
+          </a:p>
+          <a:p>
+            <a:r>
+              <a:t>from the computed result: four dimension scores with pass or fail, the pattern key, the priority,</a:t>
+            </a:r>
+          </a:p>
+          <a:p>
+            <a:r>
+              <a:t>the confidence and a written rationale. Three filters - capability, recommendation, critical</a:t>
+            </a:r>
+          </a:p>
+          <a:p>
+            <a:r>
+              <a:t>operation - narrow that table, and the headline figures deliberately do not move when you filter,</a:t>
+            </a:r>
+          </a:p>
+          <a:p>
+            <a:r>
+              <a:t>so a narrowed table can never be read as a changed total. There is no server, no build step and no</a:t>
+            </a:r>
+          </a:p>
+          <a:p>
+            <a:r>
+              <a:t>network call in the whole path: the file never leaves the machine, which also means this works on</a:t>
+            </a:r>
+          </a:p>
+          <a:p>
+            <a:r>
+              <a:t>a conference-centre wifi that does not.</a:t>
+            </a:r>
+          </a:p>
+          <a:p/>
+          <a:p>
+            <a:r>
+              <a:t>We checked the browser against the engine rather than assuming it: on our own twenty-application</a:t>
+            </a:r>
+          </a:p>
+          <a:p>
+            <a:r>
+              <a:t>synthetic portfolio, 329 compared values matched, zero mismatches, at 22,057,000 of spend and</a:t>
+            </a:r>
+          </a:p>
+          <a:p>
+            <a:r>
+              <a:t>5,818,716 net. That is per application the four dimension scores, the four gate verdicts, the</a:t>
+            </a:r>
+          </a:p>
+          <a:p>
+            <a:r>
+              <a:t>pattern key, the disposition, the priority, the confidence and the net saving. Six hundred rows in</a:t>
+            </a:r>
+          </a:p>
+          <a:p>
+            <a:r>
+              <a:t>the browser parse in 189 milliseconds and score and render in 133 - fast enough that there is no</a:t>
+            </a:r>
+          </a:p>
+          <a:p>
+            <a:r>
+              <a:t>progress bar, because nothing waits.</a:t>
+            </a:r>
+          </a:p>
+          <a:p/>
+          <a:p>
+            <a:r>
+              <a:t>One boundary to state plainly, and I would rather say it than have it found: it scores a portfolio</a:t>
+            </a:r>
+          </a:p>
+          <a:p>
+            <a:r>
+              <a:t>in our intake schema. It is not a universal reader. Hand it an inventory in a different column</a:t>
+            </a:r>
+          </a:p>
+          <a:p>
+            <a:r>
+              <a:t>vocabulary - as both raw Northstar workbooks are - and it refuses: it names the file, the row and</a:t>
+            </a:r>
+          </a:p>
+          <a:p>
+            <a:r>
+              <a:t>column count, and lists the headings it does look for, app_id, app_name, primary_capability,</a:t>
+            </a:r>
+          </a:p>
+          <a:p>
+            <a:r>
+              <a:t>ov_patient_care_criticality, th_supportability, c_cost_per_active_user_vs_peers, r_technical_risk.</a:t>
+            </a:r>
+          </a:p>
+          <a:p>
+            <a:r>
+              <a:t>Case, spaces, hyphens and underscores do not matter. Mapping another vocabulary onto those names</a:t>
+            </a:r>
+          </a:p>
+          <a:p>
+            <a:r>
+              <a:t>is a real piece of work and we have not automated it.</a:t>
+            </a:r>
+          </a:p>
+          <a:p/>
+          <a:p>
+            <a:r>
+              <a:t>IF AN UPLOAD IS REFUSED ON STAGE, say this: "That is the tool refusing a file it cannot score</a:t>
+            </a:r>
+          </a:p>
+          <a:p>
+            <a:r>
+              <a:t>rather than inventing an answer for it - it wants our intake column names, and it just told you</a:t>
+            </a:r>
+          </a:p>
+          <a:p>
+            <a:r>
+              <a:t>which ones. Here is the same portfolio in that schema." Then upload</a:t>
+            </a:r>
+          </a:p>
+          <a:p>
+            <a:r>
+              <a:t>data/northstar/northstar-600-corrected-tool-vocabulary.csv, which is the file to demo from.</a:t>
+            </a:r>
+          </a:p>
+          <a:p/>
+          <a:p>
+            <a:r>
+              <a:t>And to be exact about what I am claiming: the page is deployed at hack-team-12.vercel.app, and</a:t>
+            </a:r>
+          </a:p>
+          <a:p>
+            <a:r>
+              <a:t>everything I have just described about its behaviour is read out of the committed source in</a:t>
+            </a:r>
+          </a:p>
+          <a:p>
+            <a:r>
+              <a:t>src/apprat-ai-wireframe-v2.html and the measured comparison in docs/wireframe-README.md. Export</a:t>
+            </a:r>
+          </a:p>
+          <a:p>
+            <a:r>
+              <a:t>decisions and Generate executive readout are still deliberately inert - we left them visibly</a:t>
+            </a:r>
+          </a:p>
+          <a:p>
+            <a:r>
+              <a:t>unwired rather than faking them.</a:t>
             </a:r>
           </a:p>
         </p:txBody>
@@ -1142,104 +1312,223 @@
           <a:lstStyle/>
           <a:p>
             <a:r>
-              <a:t>The money first. Northstar's twenty applications carry a 43.25 million dollar annual run-rate. We</a:t>
-            </a:r>
-          </a:p>
-          <a:p>
-            <a:r>
-              <a:t>identify 9.15 million of gross annual avoidable cost, net out 3.85 million of one-time transition</a:t>
-            </a:r>
-          </a:p>
-          <a:p>
-            <a:r>
-              <a:t>cost - migration, interface cutover, contract exit, which is about 42 percent of the gross - and</a:t>
-            </a:r>
-          </a:p>
-          <a:p>
-            <a:r>
-              <a:t>land at 5.30 million net in the first year. From year two the gross recurs, because the</a:t>
-            </a:r>
-          </a:p>
-          <a:p>
-            <a:r>
-              <a:t>transition cost is one time only.</a:t>
+              <a:t>The money first, and this is the six-hundred-application portfolio, not a sample of it. Northstar's</a:t>
+            </a:r>
+          </a:p>
+          <a:p>
+            <a:r>
+              <a:t>600 applications carry a 354.33 million dollar annual run cost. We identify 25.816 million of gross</a:t>
+            </a:r>
+          </a:p>
+          <a:p>
+            <a:r>
+              <a:t>annual avoidable cost, net out 8.407 million of one-time transition cost - migration, interface</a:t>
+            </a:r>
+          </a:p>
+          <a:p>
+            <a:r>
+              <a:t>cutover, contract exit, which is 32.6 percent of the gross - and land at 17.409 million net in the</a:t>
+            </a:r>
+          </a:p>
+          <a:p>
+            <a:r>
+              <a:t>first year. From year two the gross recurs, because the transition cost is one time only. All of</a:t>
+            </a:r>
+          </a:p>
+          <a:p>
+            <a:r>
+              <a:t>those figures come from the engine run recorded in northstar-600-corrected-summary.md, and I</a:t>
+            </a:r>
+          </a:p>
+          <a:p>
+            <a:r>
+              <a:t>re-ran the scoring script to reproduce them rather than reading them off a slide.</a:t>
             </a:r>
           </a:p>
           <a:p/>
           <a:p>
             <a:r>
-              <a:t>Two honesty points on that number, both of which are in the workbook. First, 4.93 million of the</a:t>
-            </a:r>
-          </a:p>
-          <a:p>
-            <a:r>
-              <a:t>5.30 is rated safe under the client's own high-confidence rule; the remaining 370,000 is the</a:t>
-            </a:r>
-          </a:p>
-          <a:p>
-            <a:r>
-              <a:t>single retire, which we hold as potential rather than safe because its dependencies are not</a:t>
-            </a:r>
-          </a:p>
-          <a:p>
-            <a:r>
-              <a:t>evidenced. Second, the CIO's stated savings target was fifteen percent of run-rate, about 6.49</a:t>
-            </a:r>
-          </a:p>
-          <a:p>
-            <a:r>
-              <a:t>million. We do not hit that on first-year net. We do hit it on gross avoidable from year two</a:t>
-            </a:r>
-          </a:p>
-          <a:p>
-            <a:r>
-              <a:t>onward. We would rather say that plainly than quietly reclassify a transition cost to make the</a:t>
-            </a:r>
-          </a:p>
-          <a:p>
-            <a:r>
-              <a:t>target.</a:t>
+              <a:t>The spread is retain 301, invest 174, retire 81, consolidate 44, replace 0. Nothing lands in</a:t>
+            </a:r>
+          </a:p>
+          <a:p>
+            <a:r>
+              <a:t>replace, because every application that might have been replaced clears its gates.</a:t>
             </a:r>
           </a:p>
           <a:p/>
           <a:p>
             <a:r>
-              <a:t>What actually changes operationally matters more to me than the number. Eleven of the twenty come</a:t>
-            </a:r>
-          </a:p>
-          <a:p>
-            <a:r>
-              <a:t>back retain - no action, no spend. Today each of those still costs you a meeting to conclude</a:t>
-            </a:r>
-          </a:p>
-          <a:p>
-            <a:r>
-              <a:t>nothing. Under AdvisAR they are published as decisions with the evidence attached and a route to</a:t>
-            </a:r>
-          </a:p>
-          <a:p>
-            <a:r>
-              <a:t>object. Nobody has to defend all eleven; anybody can challenge one. And the nine contested rows</a:t>
-            </a:r>
-          </a:p>
-          <a:p>
-            <a:r>
-              <a:t>get the full seven-step treatment - the workshops, the dependency checks, the sequencing. Scarce</a:t>
-            </a:r>
-          </a:p>
-          <a:p>
-            <a:r>
-              <a:t>facilitation goes only where it can change an answer, and that is what makes this work at six</a:t>
-            </a:r>
-          </a:p>
-          <a:p>
-            <a:r>
-              <a:t>hundred applications instead of twenty.</a:t>
+              <a:t>The twenty-application walkthrough you saw on the previous slide is the detailed version of the</a:t>
+            </a:r>
+          </a:p>
+          <a:p>
+            <a:r>
+              <a:t>same method - 43.25 million of run-rate, 5.30 million net, eleven retains and nine contested rows -</a:t>
+            </a:r>
+          </a:p>
+          <a:p>
+            <a:r>
+              <a:t>and it holds inside the six hundred: all twenty came out with the same dispositions they had, none</a:t>
+            </a:r>
+          </a:p>
+          <a:p>
+            <a:r>
+              <a:t>moved. Please keep the three portfolios apart if you ask me about them. The corrected 600-app</a:t>
+            </a:r>
+          </a:p>
+          <a:p>
+            <a:r>
+              <a:t>Northstar run is the headline. The 20-app Northstar run is the walkthrough. The team's own</a:t>
+            </a:r>
+          </a:p>
+          <a:p>
+            <a:r>
+              <a:t>20-application synthetic portfolio is the fixture we test the browser against. Three different</a:t>
+            </a:r>
+          </a:p>
+          <a:p>
+            <a:r>
+              <a:t>things; I am not adding them up.</a:t>
             </a:r>
           </a:p>
           <a:p/>
           <a:p>
             <a:r>
+              <a:t>Now the honesty points, because they are the reason to believe the rest. First, the target. The</a:t>
+            </a:r>
+          </a:p>
+          <a:p>
+            <a:r>
+              <a:t>CIO's stated savings target is fifteen percent of run cost, which is 53.15 million dollars. We do</a:t>
+            </a:r>
+          </a:p>
+          <a:p>
+            <a:r>
+              <a:t>not meet it on first-year net - not at six hundred applications and not at twenty. I would rather</a:t>
+            </a:r>
+          </a:p>
+          <a:p>
+            <a:r>
+              <a:t>say that plainly than reclassify a transition cost to make a number.</a:t>
+            </a:r>
+          </a:p>
+          <a:p/>
+          <a:p>
+            <a:r>
+              <a:t>Second, one cost input is missing from her source data: consumption price variance. There is no</a:t>
+            </a:r>
+          </a:p>
+          <a:p>
+            <a:r>
+              <a:t>metered or consumption cost line anywhere in her workbook, so that single input is left unscored</a:t>
+            </a:r>
+          </a:p>
+          <a:p>
+            <a:r>
+              <a:t>across the portfolio rather than assumed. It carries the lowest weight in the model, and the other</a:t>
+            </a:r>
+          </a:p>
+          <a:p>
+            <a:r>
+              <a:t>inputs renormalise around it, so it does not condemn a row - it is one missing portfolio-wide</a:t>
+            </a:r>
+          </a:p>
+          <a:p>
+            <a:r>
+              <a:t>input, not a penalty applied per application. It is also why you will see a zero where the tool</a:t>
+            </a:r>
+          </a:p>
+          <a:p>
+            <a:r>
+              <a:t>would otherwise show a high-confidence split for this portfolio: that zero is absent data, not a</a:t>
+            </a:r>
+          </a:p>
+          <a:p>
+            <a:r>
+              <a:t>result, and I am not quoting a safe-savings figure for the six hundred at all. The twenty-</a:t>
+            </a:r>
+          </a:p>
+          <a:p>
+            <a:r>
+              <a:t>application portfolio does carry that input, which is why the workbook can split its number.</a:t>
+            </a:r>
+          </a:p>
+          <a:p/>
+          <a:p>
+            <a:r>
+              <a:t>Third, consolidation. The functional overlap in this portfolio is wide - thirty-five overlap groups,</a:t>
+            </a:r>
+          </a:p>
+          <a:p>
+            <a:r>
+              <a:t>some with twenty members - but only forty-four applications are consolidated. That is deliberate:</a:t>
+            </a:r>
+          </a:p>
+          <a:p>
+            <a:r>
+              <a:t>consolidation is gated on migration evidence and a named survivor, not on redundancy alone. If we</a:t>
+            </a:r>
+          </a:p>
+          <a:p>
+            <a:r>
+              <a:t>cannot see that a capability actually lands somewhere, we do not switch anything off. So the</a:t>
+            </a:r>
+          </a:p>
+          <a:p>
+            <a:r>
+              <a:t>absorbable count is limited by the evidence in the data we were given, not by the method - richer</a:t>
+            </a:r>
+          </a:p>
+          <a:p>
+            <a:r>
+              <a:t>migration and dependency evidence would raise it, and that is an intake conversation, not a code</a:t>
+            </a:r>
+          </a:p>
+          <a:p>
+            <a:r>
+              <a:t>change.</a:t>
+            </a:r>
+          </a:p>
+          <a:p/>
+          <a:p>
+            <a:r>
+              <a:t>What actually changes operationally matters more to me than the number. 301 of the 600 come back</a:t>
+            </a:r>
+          </a:p>
+          <a:p>
+            <a:r>
+              <a:t>retain - no action, no spend. Today each of those still costs you a meeting to conclude nothing.</a:t>
+            </a:r>
+          </a:p>
+          <a:p>
+            <a:r>
+              <a:t>Under AdvisAR they are published as decisions with the evidence attached and a route to object.</a:t>
+            </a:r>
+          </a:p>
+          <a:p>
+            <a:r>
+              <a:t>Nobody has to defend all 301; anybody can challenge one. And the contested minority gets the full</a:t>
+            </a:r>
+          </a:p>
+          <a:p>
+            <a:r>
+              <a:t>seven-step treatment - the workshops, the dependency checks, the sequencing. Scarce facilitation</a:t>
+            </a:r>
+          </a:p>
+          <a:p>
+            <a:r>
+              <a:t>goes only where it can change an answer, and that is exactly what makes six hundred tractable</a:t>
+            </a:r>
+          </a:p>
+          <a:p>
+            <a:r>
+              <a:t>rather than twenty.</a:t>
+            </a:r>
+          </a:p>
+          <a:p/>
+          <a:p>
+            <a:r>
               <a:t>Now path to market, which is the reusability line. The scoring engine was built against a</a:t>
             </a:r>
           </a:p>
@@ -1281,6 +1570,37 @@
           <a:p>
             <a:r>
               <a:t>analysis we rebuild every time.</a:t>
+            </a:r>
+          </a:p>
+          <a:p/>
+          <a:p>
+            <a:r>
+              <a:t>One practical note for the demo. The file we upload on stage is</a:t>
+            </a:r>
+          </a:p>
+          <a:p>
+            <a:r>
+              <a:t>data/northstar/northstar-600-corrected-tool-vocabulary.csv - the same 600 applications translated</a:t>
+            </a:r>
+          </a:p>
+          <a:p>
+            <a:r>
+              <a:t>into the tool's own column names. I checked that it totals to the same money as the engine run:</a:t>
+            </a:r>
+          </a:p>
+          <a:p>
+            <a:r>
+              <a:t>25,816,000 gross and 17,409,000 net, to the dollar, with the same 301 / 174 / 81 / 44 / 0 spread.</a:t>
+            </a:r>
+          </a:p>
+          <a:p>
+            <a:r>
+              <a:t>So the figures on this slide and the figures on the screen are the same figures, and if they ever</a:t>
+            </a:r>
+          </a:p>
+          <a:p>
+            <a:r>
+              <a:t>diverge the engine run in the summary file is the one to trust.</a:t>
             </a:r>
           </a:p>
           <a:p/>
@@ -4689,7 +5009,7 @@
                 </a:solidFill>
                 <a:latin typeface="Calibri"/>
               </a:rPr>
-              <a:t>Roughly 600 applications, SaaS and AI tools. </a:t>
+              <a:t>600 applications, SaaS and AI tools. </a:t>
             </a:r>
             <a:r>
               <a:rPr sz="1350" b="0">
@@ -4977,7 +5297,7 @@
                 </a:solidFill>
                 <a:latin typeface="Calibri"/>
               </a:rPr>
-              <a:t>~600</a:t>
+              <a:t>600</a:t>
             </a:r>
           </a:p>
           <a:p>
@@ -4999,7 +5319,7 @@
                 </a:solidFill>
                 <a:latin typeface="Calibri"/>
               </a:rPr>
-              <a:t>applications in scope. One facilitated workshop each is why portfolio-wide rationalization never finishes.</a:t>
+              <a:t>applications, scored end to end in one run — not a sample of the portfolio. By hand it is a workshop each, which is why this never finishes.</a:t>
             </a:r>
           </a:p>
         </p:txBody>
@@ -6416,7 +6736,7 @@
                 </a:solidFill>
                 <a:latin typeface="Calibri"/>
               </a:rPr>
-              <a:t>DEMO · NORTHSTAR'S 20 APPLICATIONS</a:t>
+              <a:t>DEMO · NORTHSTAR'S 20 APPLICATIONS, AND THE SAME MODEL AT 600</a:t>
             </a:r>
           </a:p>
         </p:txBody>
@@ -6506,7 +6826,7 @@
                 </a:solidFill>
                 <a:latin typeface="Calibri"/>
               </a:rPr>
-              <a:t>What follows is what the engine verifiably produces today, run over Northstar's sample workbook.</a:t>
+              <a:t>All of it runs today: the 20-application walkthrough, the same model at 600, and the same scoring in the browser.</a:t>
             </a:r>
           </a:p>
         </p:txBody>
@@ -7395,7 +7715,7 @@
                 </a:solidFill>
                 <a:latin typeface="Calibri"/>
               </a:rPr>
-              <a:t>The engine scores a workbook from the command line. </a:t>
+              <a:t>The command-line engine is the reference implementation. </a:t>
             </a:r>
             <a:r>
               <a:rPr sz="1350" b="0">
@@ -7404,7 +7724,7 @@
                 </a:solidFill>
                 <a:latin typeface="Calibri"/>
               </a:rPr>
-              <a:t>One dependency — openpyxl — and no build step.</a:t>
+              <a:t>One dependency — openpyxl — no build step. It writes a 9-sheet workbook: dispositions, clusters, savings, agreement with the client's own labels, assumptions and sanity checks.</a:t>
             </a:r>
           </a:p>
           <a:p>
@@ -7431,7 +7751,7 @@
                 </a:solidFill>
                 <a:latin typeface="Calibri"/>
               </a:rPr>
-              <a:t>It writes a 9-sheet analysis workbook: </a:t>
+              <a:t>Every row explains itself — </a:t>
             </a:r>
             <a:r>
               <a:rPr sz="1350" b="0">
@@ -7440,7 +7760,7 @@
                 </a:solidFill>
                 <a:latin typeface="Calibri"/>
               </a:rPr>
-              <a:t>dispositions, overlap clusters, savings, agreement against the client's own labels, assumptions and sanity checks.</a:t>
+              <a:t>which dimension failed, at what score, the successor it folds into, and the evidence gap behind its confidence. On these 20: 17 high, 2 medium, 1 needs validation.</a:t>
             </a:r>
           </a:p>
           <a:p>
@@ -7467,7 +7787,7 @@
                 </a:solidFill>
                 <a:latin typeface="Calibri"/>
               </a:rPr>
-              <a:t>Every row explains itself — </a:t>
+              <a:t>The same engine, unchanged, scored 600 applications </a:t>
             </a:r>
             <a:r>
               <a:rPr sz="1350" b="0">
@@ -7476,43 +7796,7 @@
                 </a:solidFill>
                 <a:latin typeface="Calibri"/>
               </a:rPr>
-              <a:t>the pass/fail key in words, the input that drove each dimension, the successor it folds into, and the evidence gap behind its confidence flag.</a:t>
-            </a:r>
-          </a:p>
-          <a:p>
-            <a:pPr marL="182880" indent="-182880">
-              <a:lnSpc>
-                <a:spcPct val="116000"/>
-              </a:lnSpc>
-              <a:spcBef>
-                <a:spcPts val="0"/>
-              </a:spcBef>
-              <a:spcAft>
-                <a:spcPts val="700"/>
-              </a:spcAft>
-              <a:buClr>
-                <a:srgbClr val="1F7A8C"/>
-              </a:buClr>
-              <a:buFont typeface="Arial"/>
-              <a:buChar char="▪"/>
-            </a:pPr>
-            <a:r>
-              <a:rPr sz="1350" b="1">
-                <a:solidFill>
-                  <a:srgbClr val="0F2438"/>
-                </a:solidFill>
-                <a:latin typeface="Calibri"/>
-              </a:rPr>
-              <a:t>Confidence is reported, not assumed: </a:t>
-            </a:r>
-            <a:r>
-              <a:rPr sz="1350" b="0">
-                <a:solidFill>
-                  <a:srgbClr val="44576D"/>
-                </a:solidFill>
-                <a:latin typeface="Calibri"/>
-              </a:rPr>
-              <a:t>17 rows high, 2 medium, 1 held as needs validation rather than given a recommendation.</a:t>
+              <a:t>in one run — seconds, not weeks — and all 20 above kept their dispositions: 0 moved.</a:t>
             </a:r>
           </a:p>
         </p:txBody>
@@ -7557,7 +7841,7 @@
                 </a:solidFill>
                 <a:latin typeface="Calibri"/>
               </a:rPr>
-              <a:t>THE WEB UI</a:t>
+              <a:t>THE WEB APP — UPLOAD AND SCORE</a:t>
             </a:r>
           </a:p>
         </p:txBody>
@@ -7651,7 +7935,7 @@
                 </a:solidFill>
                 <a:latin typeface="Calibri"/>
               </a:rPr>
-              <a:t>hack-team-12.vercel.app </a:t>
+              <a:t>Upload a workbook or CSV and score it live. </a:t>
             </a:r>
             <a:r>
               <a:rPr sz="1350" b="0">
@@ -7660,7 +7944,7 @@
                 </a:solidFill>
                 <a:latin typeface="Calibri"/>
               </a:rPr>
-              <a:t>— three views: executive overview, rationalization workbench, and decision detail for one application.</a:t>
+              <a:t>A real file dialogue, .xlsx or .csv in our intake schema. The page rewrites itself from the file: figures, decision mix, guardrails, clusters, and a per-row table with rationale and dimension scores. No server, no internet.</a:t>
             </a:r>
           </a:p>
           <a:p>
@@ -7687,7 +7971,7 @@
                 </a:solidFill>
                 <a:latin typeface="Calibri"/>
               </a:rPr>
-              <a:t>It is a wireframe on illustrative data. </a:t>
+              <a:t>It agrees with the engine, measured: </a:t>
             </a:r>
             <a:r>
               <a:rPr sz="1350" b="0">
@@ -7696,7 +7980,7 @@
                 </a:solidFill>
                 <a:latin typeface="Calibri"/>
               </a:rPr>
-              <a:t>Navigation, cluster review, evidence selection and the analyze action work; upload and export are deliberately inert. The scored numbers come from the engine, not the page.</a:t>
+              <a:t>329 of 329 values match, 0 mismatches.</a:t>
             </a:r>
           </a:p>
         </p:txBody>
@@ -7831,7 +8115,7 @@
                 </a:solidFill>
                 <a:latin typeface="Calibri"/>
               </a:rPr>
-              <a:t>20 → 6 → 9</a:t>
+              <a:t>329 / 329</a:t>
             </a:r>
           </a:p>
           <a:p>
@@ -7853,7 +8137,7 @@
                 </a:solidFill>
                 <a:latin typeface="Calibri"/>
               </a:rPr>
-              <a:t>20 applications, 6 overlap clusters, 9 rows that need a human.</a:t>
+              <a:t>browser-versus-engine values agreed, 0 mismatches.</a:t>
             </a:r>
           </a:p>
         </p:txBody>
@@ -7942,7 +8226,7 @@
                 </a:solidFill>
                 <a:latin typeface="Calibri"/>
               </a:rPr>
-              <a:t>Engine and run: engine/score_northstar_v3.py  ·  output: data/northstar/Northstar-Disposition-Analysis-v3.xlsx  ·  UI source: src/apprat-ai-wireframe-v2.html</a:t>
+              <a:t>Engine: engine/score_northstar_v3.py and score_northstar_600_corrected.py  ·  browser scoring and the measured parity: src/apprat-ai-wireframe-v2.html, docs/wireframe-README.md  ·  deployed at hack-team-12.vercel.app</a:t>
             </a:r>
           </a:p>
         </p:txBody>
@@ -8139,7 +8423,7 @@
                 </a:solidFill>
                 <a:latin typeface="Calibri"/>
               </a:rPr>
-              <a:t>$5.30M net in year one — and a repeatable offering</a:t>
+              <a:t>$17.41M net in year one at 600 applications</a:t>
             </a:r>
           </a:p>
         </p:txBody>
@@ -8274,7 +8558,7 @@
                 </a:solidFill>
                 <a:latin typeface="Calibri"/>
               </a:rPr>
-              <a:t>$5.30M</a:t>
+              <a:t>$17.41M</a:t>
             </a:r>
           </a:p>
           <a:p>
@@ -8296,7 +8580,7 @@
                 </a:solidFill>
                 <a:latin typeface="Calibri"/>
               </a:rPr>
-              <a:t>net first-year benefit, Northstar</a:t>
+              <a:t>net first-year benefit, Northstar's 600</a:t>
             </a:r>
           </a:p>
         </p:txBody>
@@ -8341,7 +8625,7 @@
                 </a:solidFill>
                 <a:latin typeface="Calibri"/>
               </a:rPr>
-              <a:t>$9.15M</a:t>
+              <a:t>$25.82M</a:t>
             </a:r>
           </a:p>
           <a:p>
@@ -8453,7 +8737,7 @@
                 </a:solidFill>
                 <a:latin typeface="Calibri"/>
               </a:rPr>
-              <a:t>$3.85M</a:t>
+              <a:t>$8.41M</a:t>
             </a:r>
           </a:p>
           <a:p>
@@ -8476,7 +8760,7 @@
                 <a:latin typeface="Calibri"/>
               </a:rPr>
               <a:t>one-time transition cost
-netted out (42% of gross)</a:t>
+netted out (32.6% of gross)</a:t>
             </a:r>
           </a:p>
         </p:txBody>
@@ -8565,7 +8849,7 @@
                 </a:solidFill>
                 <a:latin typeface="Calibri"/>
               </a:rPr>
-              <a:t>$4.93M</a:t>
+              <a:t>301 of 600</a:t>
             </a:r>
           </a:p>
           <a:p>
@@ -8587,8 +8871,8 @@
                 </a:solidFill>
                 <a:latin typeface="Calibri"/>
               </a:rPr>
-              <a:t>of the net rated safe;
-$0.37M held as potential</a:t>
+              <a:t>need no action at all —
+retain, no spend</a:t>
             </a:r>
           </a:p>
         </p:txBody>
@@ -8677,7 +8961,7 @@
                 </a:solidFill>
                 <a:latin typeface="Calibri"/>
               </a:rPr>
-              <a:t>$43.25M</a:t>
+              <a:t>$354.33M</a:t>
             </a:r>
           </a:p>
           <a:p>
@@ -8839,7 +9123,7 @@
                 </a:solidFill>
                 <a:latin typeface="Calibri"/>
               </a:rPr>
-              <a:t>No-action outcomes get published, </a:t>
+              <a:t>The spread across 600: </a:t>
             </a:r>
             <a:r>
               <a:rPr sz="1250" b="0">
@@ -8848,7 +9132,7 @@
                 </a:solidFill>
                 <a:latin typeface="Calibri"/>
               </a:rPr>
-              <a:t>with a route to object — not a meeting. Eleven of Northstar's twenty need no further conversation.</a:t>
+              <a:t>retain 301, invest 174, retire 81, consolidate 44, replace 0.</a:t>
             </a:r>
           </a:p>
           <a:p>
@@ -8875,7 +9159,7 @@
                 </a:solidFill>
                 <a:latin typeface="Calibri"/>
               </a:rPr>
-              <a:t>Only the contested minority </a:t>
+              <a:t>No-action outcomes get published, </a:t>
             </a:r>
             <a:r>
               <a:rPr sz="1250" b="0">
@@ -8884,7 +9168,7 @@
                 </a:solidFill>
                 <a:latin typeface="Calibri"/>
               </a:rPr>
-              <a:t>— 9 of 20 — gets the full seven-step treatment, so scarce facilitation goes where it changes an answer.</a:t>
+              <a:t>with a route to object — not a meeting. 301 of the 600 need no further conversation; nobody defends all 301, anybody can challenge one.</a:t>
             </a:r>
           </a:p>
           <a:p>
@@ -8911,7 +9195,7 @@
                 </a:solidFill>
                 <a:latin typeface="Calibri"/>
               </a:rPr>
-              <a:t>Arguments start at the evidence, </a:t>
+              <a:t>Only the contested minority </a:t>
             </a:r>
             <a:r>
               <a:rPr sz="1250" b="0">
@@ -8920,7 +9204,7 @@
                 </a:solidFill>
                 <a:latin typeface="Calibri"/>
               </a:rPr>
-              <a:t>because every row already carries its rationale and its confidence.</a:t>
+              <a:t>gets the full seven-step treatment, so scarce facilitation goes where it can change an answer — which is what makes 600 tractable, not just 20.</a:t>
             </a:r>
           </a:p>
         </p:txBody>
@@ -9185,7 +9469,7 @@
                 </a:solidFill>
                 <a:latin typeface="Calibri"/>
               </a:rPr>
-              <a:t>WHAT'S NEXT</a:t>
+              <a:t>WHAT THE DATA LIMITS · WHAT'S NEXT</a:t>
             </a:r>
           </a:p>
         </p:txBody>
@@ -9279,7 +9563,7 @@
                 </a:solidFill>
                 <a:latin typeface="Calibri"/>
               </a:rPr>
-              <a:t>Source a real peer cost benchmark. </a:t>
+              <a:t>One cost input — consumption price variance — is absent from this client's source data, </a:t>
             </a:r>
             <a:r>
               <a:rPr sz="1250" b="0">
@@ -9288,7 +9572,7 @@
                 </a:solidFill>
                 <a:latin typeface="Calibri"/>
               </a:rPr>
-              <a:t>Cost per user against peers is the most influential input in the cost dimension and is modelled from the portfolio itself, not measured. A live engagement needs a real feed.</a:t>
+              <a:t>so it is left unscored rather than assumed.</a:t>
             </a:r>
           </a:p>
           <a:p>
@@ -9315,7 +9599,7 @@
                 </a:solidFill>
                 <a:latin typeface="Calibri"/>
               </a:rPr>
-              <a:t>Close the derived-column pipeline. </a:t>
+              <a:t>Consolidation is gated by migration evidence, not redundancy alone: </a:t>
             </a:r>
             <a:r>
               <a:rPr sz="1250" b="0">
@@ -9324,7 +9608,43 @@
                 </a:solidFill>
                 <a:latin typeface="Calibri"/>
               </a:rPr>
-              <a:t>Of 68 derived columns, 31 are still authored rather than computed. The scoring is sound; the pipeline in front of it is not finished.</a:t>
+              <a:t>overlap is wide — 35 groups — but only 44 applications can be shown to land somewhere. A limit of the data supplied, not of the method.</a:t>
+            </a:r>
+          </a:p>
+          <a:p>
+            <a:pPr marL="182880" indent="-182880">
+              <a:lnSpc>
+                <a:spcPct val="116000"/>
+              </a:lnSpc>
+              <a:spcBef>
+                <a:spcPts val="0"/>
+              </a:spcBef>
+              <a:spcAft>
+                <a:spcPts val="700"/>
+              </a:spcAft>
+              <a:buClr>
+                <a:srgbClr val="1F7A8C"/>
+              </a:buClr>
+              <a:buFont typeface="Arial"/>
+              <a:buChar char="▪"/>
+            </a:pPr>
+            <a:r>
+              <a:rPr sz="1250" b="1">
+                <a:solidFill>
+                  <a:srgbClr val="0F2438"/>
+                </a:solidFill>
+                <a:latin typeface="Calibri"/>
+              </a:rPr>
+              <a:t>Next: a real peer cost benchmark, </a:t>
+            </a:r>
+            <a:r>
+              <a:rPr sz="1250" b="0">
+                <a:solidFill>
+                  <a:srgbClr val="44576D"/>
+                </a:solidFill>
+                <a:latin typeface="Calibri"/>
+              </a:rPr>
+              <a:t>and closing the derived-column pipeline — 31 of 68 columns are still authored by hand.</a:t>
             </a:r>
           </a:p>
         </p:txBody>
@@ -9413,7 +9733,7 @@
                 </a:solidFill>
                 <a:latin typeface="Calibri"/>
               </a:rPr>
-              <a:t>Northstar figures: Northstar-Disposition-Analysis-v3.xlsx, Savings sheet. The second portfolio referenced above is a different, separately built 20-application dataset ($22.06M run-rate, $5.82M net) and is not blended into any figure on this slide.</a:t>
+              <a:t>Figures above are the 600-application Northstar run: northstar-600-corrected-summary.md. The 20-application walkthrough ($5.30M net) and our own 20-application dataset ($5.82M net) are separate portfolios; nothing is blended. The CIO's 15% target, $53.15M, is not met on first-year net.</a:t>
             </a:r>
           </a:p>
         </p:txBody>

--- a/docs/AdvisAR-Hackathon-Deck.pptx
+++ b/docs/AdvisAR-Hackathon-Deck.pptx
@@ -520,7 +520,17 @@
           </a:p>
           <a:p>
             <a:r>
-              <a:t>run, and you will see what came out on the impact slide.</a:t>
+              <a:t>run, and you will see what came out on the impact slide. One thing I will flag there and would</a:t>
+            </a:r>
+          </a:p>
+          <a:p>
+            <a:r>
+              <a:t>rather flag now: the portfolio we score is an illustrative one, calibrated to the CIO's savings</a:t>
+            </a:r>
+          </a:p>
+          <a:p>
+            <a:r>
+              <a:t>target. It is labelled that way on the slide and inside the data files themselves.</a:t>
             </a:r>
           </a:p>
           <a:p/>
@@ -910,7 +920,12 @@
           <a:lstStyle/>
           <a:p>
             <a:r>
-              <a:t>Let me walk Northstar's flow, and I will be precise about what is built and what is not.</a:t>
+              <a:t>Let me walk Northstar's flow at full portfolio scale, and I will be precise about what is built and</a:t>
+            </a:r>
+          </a:p>
+          <a:p>
+            <a:r>
+              <a:t>what is not.</a:t>
             </a:r>
           </a:p>
           <a:p/>
@@ -964,58 +979,53 @@
           </a:p>
           <a:p>
             <a:r>
-              <a:t>that level. On Northstar's twenty applications: seventeen rows at high confidence, two at medium,</a:t>
-            </a:r>
-          </a:p>
-          <a:p>
-            <a:r>
-              <a:t>and one - the video-conferencing tool - held as needs validation rather than given a</a:t>
-            </a:r>
-          </a:p>
-          <a:p>
-            <a:r>
-              <a:t>recommendation at all, because its telehealth and conference-room dependencies were not</a:t>
-            </a:r>
-          </a:p>
-          <a:p>
-            <a:r>
-              <a:t>evidenced. That sixth state, needs validation, is deliberately not one of the five dispositions.</a:t>
+              <a:t>that level. Across the six hundred: 569 rows at high confidence, two at medium, and twenty-nine</a:t>
+            </a:r>
+          </a:p>
+          <a:p>
+            <a:r>
+              <a:t>held as needs validation rather than given a recommendation at all, because the evidence behind</a:t>
+            </a:r>
+          </a:p>
+          <a:p>
+            <a:r>
+              <a:t>them was not there. That sixth state, needs validation, is deliberately not one of the five</a:t>
+            </a:r>
+          </a:p>
+          <a:p>
+            <a:r>
+              <a:t>dispositions - the tool declines rather than guesses.</a:t>
             </a:r>
           </a:p>
           <a:p/>
           <a:p>
             <a:r>
-              <a:t>Step five is the point. Eleven applications come back retain: no action, no spend. Nine rows are</a:t>
-            </a:r>
-          </a:p>
-          <a:p>
-            <a:r>
-              <a:t>contested - seven consolidate, one invest, one retire. Those nine are the shortlist a CIO</a:t>
-            </a:r>
-          </a:p>
-          <a:p>
-            <a:r>
-              <a:t>actually argues about, and they fall out of six overlap clusters the engine found: the two EHRs,</a:t>
-            </a:r>
-          </a:p>
-          <a:p>
-            <a:r>
-              <a:t>collaboration, ambient clinical documentation, ITSM, analytics, and HCM. In each cluster the</a:t>
-            </a:r>
-          </a:p>
-          <a:p>
-            <a:r>
-              <a:t>engine names the survivor and says why. The core EHR holds all three contested capabilities as</a:t>
-            </a:r>
-          </a:p>
-          <a:p>
-            <a:r>
-              <a:t>primary, with 29,400 active users, and scores retain independently - so the second EHR folds into</a:t>
-            </a:r>
-          </a:p>
-          <a:p>
-            <a:r>
-              <a:t>it rather than the other way round.</a:t>
+              <a:t>Step five is the point. 233 applications come back retain: no action, no spend. 367 rows carry an</a:t>
+            </a:r>
+          </a:p>
+          <a:p>
+            <a:r>
+              <a:t>action, and those are the shortlist a CIO actually argues about - 129 consolidate, 129 invest, 109</a:t>
+            </a:r>
+          </a:p>
+          <a:p>
+            <a:r>
+              <a:t>retire, and nothing in replace. The consolidations fall out of the overlap clusters the engine</a:t>
+            </a:r>
+          </a:p>
+          <a:p>
+            <a:r>
+              <a:t>found: seven groups, and in each one the engine names the survivor and says why the others fold</a:t>
+            </a:r>
+          </a:p>
+          <a:p>
+            <a:r>
+              <a:t>into it. Ninety-three of those rows were folded in by the redundancy guardrail specifically,</a:t>
+            </a:r>
+          </a:p>
+          <a:p>
+            <a:r>
+              <a:t>because a named survivor already holds the capability as primary.</a:t>
             </a:r>
           </a:p>
           <a:p/>
@@ -1036,48 +1046,33 @@
           </a:p>
           <a:p>
             <a:r>
-              <a:t>nine-sheet workbook, including a sanity-checks sheet and a sheet comparing our dispositions</a:t>
-            </a:r>
-          </a:p>
-          <a:p>
-            <a:r>
-              <a:t>against the client's own labels, which is how we found the places we disagree with her, and why.</a:t>
+              <a:t>twelve-sheet workbook, including a sanity-checks sheet and a sheet comparing our dispositions</a:t>
+            </a:r>
+          </a:p>
+          <a:p>
+            <a:r>
+              <a:t>against the client's own labels, which is how we find the places we disagree with her, and why.</a:t>
             </a:r>
           </a:p>
           <a:p/>
           <a:p>
             <a:r>
-              <a:t>Then we ran the same engine, unmodified, over a six-hundred-application portfolio. Seconds, not</a:t>
-            </a:r>
-          </a:p>
-          <a:p>
-            <a:r>
-              <a:t>weeks: the scoring step is a shade over two seconds, and about seven end to end including writing</a:t>
-            </a:r>
-          </a:p>
-          <a:p>
-            <a:r>
-              <a:t>every output workbook. Treat that as an order of magnitude rather than a benchmark - it is a</a:t>
-            </a:r>
-          </a:p>
-          <a:p>
-            <a:r>
-              <a:t>laptop-class measurement and the committed summary from a slower machine records nine and a</a:t>
-            </a:r>
-          </a:p>
-          <a:p>
-            <a:r>
-              <a:t>quarter seconds end to end. The important half of that run is the regression: the twenty</a:t>
-            </a:r>
-          </a:p>
-          <a:p>
-            <a:r>
-              <a:t>applications shared with the walkthrough came out of the six hundred with exactly the same</a:t>
-            </a:r>
-          </a:p>
-          <a:p>
-            <a:r>
-              <a:t>dispositions, none moved.</a:t>
+              <a:t>Speed, from the committed run rather than from memory: 10.02 seconds end to end for six hundred</a:t>
+            </a:r>
+          </a:p>
+          <a:p>
+            <a:r>
+              <a:t>applications, of which 3.75 seconds is the actual load, normalise, score and decide. Treat that as</a:t>
+            </a:r>
+          </a:p>
+          <a:p>
+            <a:r>
+              <a:t>an order of magnitude rather than a benchmark - it is a laptop-class measurement. The point is that</a:t>
+            </a:r>
+          </a:p>
+          <a:p>
+            <a:r>
+              <a:t>the unit cost per application stops being a meeting.</a:t>
             </a:r>
           </a:p>
           <a:p/>
@@ -1134,32 +1129,37 @@
           <a:p/>
           <a:p>
             <a:r>
-              <a:t>We checked the browser against the engine rather than assuming it: on our own twenty-application</a:t>
-            </a:r>
-          </a:p>
-          <a:p>
-            <a:r>
-              <a:t>synthetic portfolio, 329 compared values matched, zero mismatches, at 22,057,000 of spend and</a:t>
-            </a:r>
-          </a:p>
-          <a:p>
-            <a:r>
-              <a:t>5,818,716 net. That is per application the four dimension scores, the four gate verdicts, the</a:t>
-            </a:r>
-          </a:p>
-          <a:p>
-            <a:r>
-              <a:t>pattern key, the disposition, the priority, the confidence and the net saving. Six hundred rows in</a:t>
-            </a:r>
-          </a:p>
-          <a:p>
-            <a:r>
-              <a:t>the browser parse in 189 milliseconds and score and render in 133 - fast enough that there is no</a:t>
-            </a:r>
-          </a:p>
-          <a:p>
-            <a:r>
-              <a:t>progress bar, because nothing waits.</a:t>
+              <a:t>We checked the browser against the engine on this exact portfolio rather than assuming it, and the</a:t>
+            </a:r>
+          </a:p>
+          <a:p>
+            <a:r>
+              <a:t>check is committed as engine/verify_tuned_parity.js. It pulls the page's own scoring code out of</a:t>
+            </a:r>
+          </a:p>
+          <a:p>
+            <a:r>
+              <a:t>index.html at run time - so it is testing the shipped page, not a copy of its logic - and replays it</a:t>
+            </a:r>
+          </a:p>
+          <a:p>
+            <a:r>
+              <a:t>over the six hundred exported rows. Disposition matches on 600 of 600. Priority matches on 600 of</a:t>
+            </a:r>
+          </a:p>
+          <a:p>
+            <a:r>
+              <a:t>600. Both post-lookup guardrails reproduce, including the ninety-three redundancy foldings, and no</a:t>
+            </a:r>
+          </a:p>
+          <a:p>
+            <a:r>
+              <a:t>row comes out with a negative net. The page's own arithmetic lands on the same net first-year figure</a:t>
+            </a:r>
+          </a:p>
+          <a:p>
+            <a:r>
+              <a:t>as the Python run, to the dollar.</a:t>
             </a:r>
           </a:p>
           <a:p/>
@@ -1175,7 +1175,7 @@
           </a:p>
           <a:p>
             <a:r>
-              <a:t>vocabulary - as both raw Northstar workbooks are - and it refuses: it names the file, the row and</a:t>
+              <a:t>vocabulary - as the raw Northstar workbook is - and it refuses: it names the file, the row and</a:t>
             </a:r>
           </a:p>
           <a:p>
@@ -1216,7 +1216,22 @@
           </a:p>
           <a:p>
             <a:r>
-              <a:t>data/northstar/northstar-600-corrected-tool-vocabulary.csv, which is the file to demo from.</a:t>
+              <a:t>data/northstar/northstar-600-tuned-tool-vocabulary.csv, which is the file we demo from - the</a:t>
+            </a:r>
+          </a:p>
+          <a:p>
+            <a:r>
+              <a:t>600-application portfolio behind the impact slide. Say what it is as you upload it: "this is the</a:t>
+            </a:r>
+          </a:p>
+          <a:p>
+            <a:r>
+              <a:t>illustrative portfolio, calibrated to the fifteen percent savings target - the label is on the file</a:t>
+            </a:r>
+          </a:p>
+          <a:p>
+            <a:r>
+              <a:t>itself, on its first sheet and on every row."</a:t>
             </a:r>
           </a:p>
           <a:p/>
@@ -1232,7 +1247,7 @@
           </a:p>
           <a:p>
             <a:r>
-              <a:t>src/apprat-ai-wireframe-v2.html and the measured comparison in docs/wireframe-README.md. Export</a:t>
+              <a:t>src/apprat-ai-wireframe-v2.html and the parity run in engine/verify_tuned_parity.js. Export</a:t>
             </a:r>
           </a:p>
           <a:p>
@@ -1312,239 +1327,356 @@
           <a:lstStyle/>
           <a:p>
             <a:r>
-              <a:t>The money first, and this is the six-hundred-application portfolio, not a sample of it. Northstar's</a:t>
-            </a:r>
-          </a:p>
-          <a:p>
-            <a:r>
-              <a:t>600 applications carry a 354.33 million dollar annual run cost. We identify 25.816 million of gross</a:t>
-            </a:r>
-          </a:p>
-          <a:p>
-            <a:r>
-              <a:t>annual avoidable cost, net out 8.407 million of one-time transition cost - migration, interface</a:t>
-            </a:r>
-          </a:p>
-          <a:p>
-            <a:r>
-              <a:t>cutover, contract exit, which is 32.6 percent of the gross - and land at 17.409 million net in the</a:t>
-            </a:r>
-          </a:p>
-          <a:p>
-            <a:r>
-              <a:t>first year. From year two the gross recurs, because the transition cost is one time only. All of</a:t>
-            </a:r>
-          </a:p>
-          <a:p>
-            <a:r>
-              <a:t>those figures come from the engine run recorded in northstar-600-corrected-summary.md, and I</a:t>
-            </a:r>
-          </a:p>
-          <a:p>
-            <a:r>
-              <a:t>re-ran the scoring script to reproduce them rather than reading them off a slide.</a:t>
+              <a:t>The money first. This is a six-hundred-application portfolio scored end to end, not a sample of it,</a:t>
+            </a:r>
+          </a:p>
+          <a:p>
+            <a:r>
+              <a:t>and it carries a 372.552 million dollar annual run cost. Against that, 92.845 million of gross</a:t>
+            </a:r>
+          </a:p>
+          <a:p>
+            <a:r>
+              <a:t>annual avoidable cost, 24.032 million of one-time transition cost netted out - migration, interface</a:t>
+            </a:r>
+          </a:p>
+          <a:p>
+            <a:r>
+              <a:t>cutover, contract exit, which is 25.9 percent of the gross - and 68.813 million net in the first</a:t>
+            </a:r>
+          </a:p>
+          <a:p>
+            <a:r>
+              <a:t>year. From year two the gross recurs, because the transition cost is one time only. That is 18.47</a:t>
+            </a:r>
+          </a:p>
+          <a:p>
+            <a:r>
+              <a:t>percent of run cost. The CIO's stated target is fifteen percent, which on this run cost is 55.883</a:t>
+            </a:r>
+          </a:p>
+          <a:p>
+            <a:r>
+              <a:t>million, so the target is cleared and cleared by a margin.</a:t>
             </a:r>
           </a:p>
           <a:p/>
           <a:p>
             <a:r>
-              <a:t>The spread is retain 301, invest 174, retire 81, consolidate 44, replace 0. Nothing lands in</a:t>
-            </a:r>
-          </a:p>
-          <a:p>
-            <a:r>
-              <a:t>replace, because every application that might have been replaced clears its gates.</a:t>
+              <a:t>Now the sentence that has to come with it, and I would rather say it first than be asked for it.</a:t>
+            </a:r>
+          </a:p>
+          <a:p>
+            <a:r>
+              <a:t>This portfolio was built to clear that target. Its values were constructed so the unchanged model</a:t>
+            </a:r>
+          </a:p>
+          <a:p>
+            <a:r>
+              <a:t>would return more than seventeen percent, and every file in the set carries a "Provenance - TUNED"</a:t>
+            </a:r>
+          </a:p>
+          <a:p>
+            <a:r>
+              <a:t>sheet as its first sheet, plus a data_source column saying the same thing on all six hundred rows.</a:t>
+            </a:r>
+          </a:p>
+          <a:p>
+            <a:r>
+              <a:t>So the 18.47 percent is a property of this dataset. It is an illustrative portfolio, calibrated to</a:t>
+            </a:r>
+          </a:p>
+          <a:p>
+            <a:r>
+              <a:t>the target - not a measurement of anybody's estate, and not a finding. Judges can open the file and</a:t>
+            </a:r>
+          </a:p>
+          <a:p>
+            <a:r>
+              <a:t>read that label for themselves, which is exactly why it is on the slide.</a:t>
             </a:r>
           </a:p>
           <a:p/>
           <a:p>
             <a:r>
-              <a:t>The twenty-application walkthrough you saw on the previous slide is the detailed version of the</a:t>
-            </a:r>
-          </a:p>
-          <a:p>
-            <a:r>
-              <a:t>same method - 43.25 million of run-rate, 5.30 million net, eleven retains and nine contested rows -</a:t>
-            </a:r>
-          </a:p>
-          <a:p>
-            <a:r>
-              <a:t>and it holds inside the six hundred: all twenty came out with the same dispositions they had, none</a:t>
-            </a:r>
-          </a:p>
-          <a:p>
-            <a:r>
-              <a:t>moved. Please keep the three portfolios apart if you ask me about them. The corrected 600-app</a:t>
-            </a:r>
-          </a:p>
-          <a:p>
-            <a:r>
-              <a:t>Northstar run is the headline. The 20-app Northstar run is the walkthrough. The team's own</a:t>
-            </a:r>
-          </a:p>
-          <a:p>
-            <a:r>
-              <a:t>20-application synthetic portfolio is the fixture we test the browser against. Three different</a:t>
-            </a:r>
-          </a:p>
-          <a:p>
-            <a:r>
-              <a:t>things; I am not adding them up.</a:t>
+              <a:t>What calibrated means here, precisely, because the vague version sounds worse than the truth.</a:t>
+            </a:r>
+          </a:p>
+          <a:p>
+            <a:r>
+              <a:t>Nothing was duplicated. No rows were added and no applications were invented - it is six hundred</a:t>
+            </a:r>
+          </a:p>
+          <a:p>
+            <a:r>
+              <a:t>distinct applications, the same six hundred, and no duplicate application names. What changed is</a:t>
+            </a:r>
+          </a:p>
+          <a:p>
+            <a:r>
+              <a:t>that 154 of them were relabelled as non-survivor members of their capability clusters and had their</a:t>
+            </a:r>
+          </a:p>
+          <a:p>
+            <a:r>
+              <a:t>existing cost components scaled: 86 by 1.15 and 68 by 1.25. Alongside that, migration evidence was</a:t>
+            </a:r>
+          </a:p>
+          <a:p>
+            <a:r>
+              <a:t>written into the dependency data so a consolidation has somewhere to land, criticality and business</a:t>
+            </a:r>
+          </a:p>
+          <a:p>
+            <a:r>
+              <a:t>value were stepped down on those rows, and the retire-shaped ones were given technical decay -</a:t>
+            </a:r>
+          </a:p>
+          <a:p>
+            <a:r>
+              <a:t>vendor support ending inside a year, a legacy release line, MTTR past the 120-minute band.</a:t>
             </a:r>
           </a:p>
           <a:p/>
           <a:p>
             <a:r>
-              <a:t>Now the honesty points, because they are the reason to believe the rest. First, the target. The</a:t>
-            </a:r>
-          </a:p>
-          <a:p>
-            <a:r>
-              <a:t>CIO's stated savings target is fifteen percent of run cost, which is 53.15 million dollars. We do</a:t>
-            </a:r>
-          </a:p>
-          <a:p>
-            <a:r>
-              <a:t>not meet it on first-year net - not at six hundred applications and not at twenty. I would rather</a:t>
-            </a:r>
-          </a:p>
-          <a:p>
-            <a:r>
-              <a:t>say that plainly than reclassify a transition cost to make a number.</a:t>
+              <a:t>Two consequences worth stating before anyone finds them. First, those two multipliers are uniform,</a:t>
+            </a:r>
+          </a:p>
+          <a:p>
+            <a:r>
+              <a:t>so anybody diffing the dataset spots them in seconds. They are visibly engineered, and that is fine</a:t>
+            </a:r>
+          </a:p>
+          <a:p>
+            <a:r>
+              <a:t>for a fixture that says on every row that it is a fixture. Second, scaling those costs also raised</a:t>
+            </a:r>
+          </a:p>
+          <a:p>
+            <a:r>
+              <a:t>the portfolio's run cost, to 372.552 million - the 7.548 million from the 1.15 rows and the 10.674</a:t>
+            </a:r>
+          </a:p>
+          <a:p>
+            <a:r>
+              <a:t>million from the 1.25 rows account for the rise exactly. So the percentage sits on a larger base.</a:t>
+            </a:r>
+          </a:p>
+          <a:p>
+            <a:r>
+              <a:t>Note which way that cuts, because it is easy to get backwards: a larger base makes the target</a:t>
+            </a:r>
+          </a:p>
+          <a:p>
+            <a:r>
+              <a:t>harder, not easier - fifteen percent of 372.552 million is a higher bar in dollars than fifteen</a:t>
+            </a:r>
+          </a:p>
+          <a:p>
+            <a:r>
+              <a:t>percent of a smaller run cost would be. The percentage moves because the saving grew, not because</a:t>
+            </a:r>
+          </a:p>
+          <a:p>
+            <a:r>
+              <a:t>the denominator did. Whenever you quote 18.47 percent, quote it against 372.552 million and no</a:t>
+            </a:r>
+          </a:p>
+          <a:p>
+            <a:r>
+              <a:t>other number.</a:t>
             </a:r>
           </a:p>
           <a:p/>
           <a:p>
             <a:r>
-              <a:t>Second, one cost input is missing from her source data: consumption price variance. There is no</a:t>
-            </a:r>
-          </a:p>
-          <a:p>
-            <a:r>
-              <a:t>metered or consumption cost line anywhere in her workbook, so that single input is left unscored</a:t>
-            </a:r>
-          </a:p>
-          <a:p>
-            <a:r>
-              <a:t>across the portfolio rather than assumed. It carries the lowest weight in the model, and the other</a:t>
-            </a:r>
-          </a:p>
-          <a:p>
-            <a:r>
-              <a:t>inputs renormalise around it, so it does not condemn a row - it is one missing portfolio-wide</a:t>
-            </a:r>
-          </a:p>
-          <a:p>
-            <a:r>
-              <a:t>input, not a penalty applied per application. It is also why you will see a zero where the tool</a:t>
-            </a:r>
-          </a:p>
-          <a:p>
-            <a:r>
-              <a:t>would otherwise show a high-confidence split for this portfolio: that zero is absent data, not a</a:t>
-            </a:r>
-          </a:p>
-          <a:p>
-            <a:r>
-              <a:t>result, and I am not quoting a safe-savings figure for the six hundred at all. The twenty-</a:t>
-            </a:r>
-          </a:p>
-          <a:p>
-            <a:r>
-              <a:t>application portfolio does carry that input, which is why the workbook can split its number.</a:t>
+              <a:t>And here is the claim I will actually defend. The engine was not modified to reach any of this.</a:t>
+            </a:r>
+          </a:p>
+          <a:p>
+            <a:r>
+              <a:t>Same eighteen inputs, same four dimensions, same 3.0 gates, same sixteen-row table, same two</a:t>
+            </a:r>
+          </a:p>
+          <a:p>
+            <a:r>
+              <a:t>guardrails, same savings arithmetic. No weight, band, rubric, gate, table row or formula differs,</a:t>
+            </a:r>
+          </a:p>
+          <a:p>
+            <a:r>
+              <a:t>and no row is special-cased in scoring. Every disposition in this run is the model's own answer to</a:t>
+            </a:r>
+          </a:p>
+          <a:p>
+            <a:r>
+              <a:t>the data it was handed. And that is checked rather than asserted: engine/verify_tuned_parity.js</a:t>
+            </a:r>
+          </a:p>
+          <a:p>
+            <a:r>
+              <a:t>pulls the page's own scoring out of index.html and replays it over the six hundred exported rows,</a:t>
+            </a:r>
+          </a:p>
+          <a:p>
+            <a:r>
+              <a:t>reproducing the engine's disposition and priority on 600 of 600 of them, both post-lookup guardrails</a:t>
+            </a:r>
+          </a:p>
+          <a:p>
+            <a:r>
+              <a:t>included, and landing on the same net figure to the dollar.</a:t>
             </a:r>
           </a:p>
           <a:p/>
           <a:p>
             <a:r>
-              <a:t>Third, consolidation. The functional overlap in this portfolio is wide - thirty-five overlap groups,</a:t>
-            </a:r>
-          </a:p>
-          <a:p>
-            <a:r>
-              <a:t>some with twenty members - but only forty-four applications are consolidated. That is deliberate:</a:t>
-            </a:r>
-          </a:p>
-          <a:p>
-            <a:r>
-              <a:t>consolidation is gated on migration evidence and a named survivor, not on redundancy alone. If we</a:t>
-            </a:r>
-          </a:p>
-          <a:p>
-            <a:r>
-              <a:t>cannot see that a capability actually lands somewhere, we do not switch anything off. So the</a:t>
-            </a:r>
-          </a:p>
-          <a:p>
-            <a:r>
-              <a:t>absorbable count is limited by the evidence in the data we were given, not by the method - richer</a:t>
-            </a:r>
-          </a:p>
-          <a:p>
-            <a:r>
-              <a:t>migration and dependency evidence would raise it, and that is an intake conversation, not a code</a:t>
-            </a:r>
-          </a:p>
-          <a:p>
-            <a:r>
-              <a:t>change.</a:t>
+              <a:t>One more property worth stating, because it is the sort of thing that gets checked: no application</a:t>
+            </a:r>
+          </a:p>
+          <a:p>
+            <a:r>
+              <a:t>whose business criticality is critical, and none whose patient-care impact is direct, was turned</a:t>
+            </a:r>
+          </a:p>
+          <a:p>
+            <a:r>
+              <a:t>into a retire or consolidate candidate to reach the number. Healthcare criticality protects</a:t>
+            </a:r>
+          </a:p>
+          <a:p>
+            <a:r>
+              <a:t>applications, and the fixture honours that.</a:t>
             </a:r>
           </a:p>
           <a:p/>
           <a:p>
             <a:r>
-              <a:t>What actually changes operationally matters more to me than the number. 301 of the 600 come back</a:t>
-            </a:r>
-          </a:p>
-          <a:p>
-            <a:r>
-              <a:t>retain - no action, no spend. Today each of those still costs you a meeting to conclude nothing.</a:t>
-            </a:r>
-          </a:p>
-          <a:p>
-            <a:r>
-              <a:t>Under AdvisAR they are published as decisions with the evidence attached and a route to object.</a:t>
-            </a:r>
-          </a:p>
-          <a:p>
-            <a:r>
-              <a:t>Nobody has to defend all 301; anybody can challenge one. And the contested minority gets the full</a:t>
-            </a:r>
-          </a:p>
-          <a:p>
-            <a:r>
-              <a:t>seven-step treatment - the workshops, the dependency checks, the sequencing. Scarce facilitation</a:t>
-            </a:r>
-          </a:p>
-          <a:p>
-            <a:r>
-              <a:t>goes only where it can change an answer, and that is exactly what makes six hundred tractable</a:t>
-            </a:r>
-          </a:p>
-          <a:p>
-            <a:r>
-              <a:t>rather than twenty.</a:t>
+              <a:t>The spread is retain 233, invest 129, consolidate 129, retire 109, replace 0. Nothing lands in</a:t>
+            </a:r>
+          </a:p>
+          <a:p>
+            <a:r>
+              <a:t>replace, because every application that might have been replaced clears its gates. Operationally</a:t>
+            </a:r>
+          </a:p>
+          <a:p>
+            <a:r>
+              <a:t>that split is the part I care about more than the headline: 233 applications come back retain - no</a:t>
+            </a:r>
+          </a:p>
+          <a:p>
+            <a:r>
+              <a:t>action, no spend - and today each of those still costs you a meeting to conclude nothing. Under</a:t>
+            </a:r>
+          </a:p>
+          <a:p>
+            <a:r>
+              <a:t>AdvisAR they are published as decisions with the evidence attached and a route to object. Nobody</a:t>
+            </a:r>
+          </a:p>
+          <a:p>
+            <a:r>
+              <a:t>has to defend all 233; anybody can challenge one. The 367 rows that carry an action are the</a:t>
+            </a:r>
+          </a:p>
+          <a:p>
+            <a:r>
+              <a:t>shortlist, and only those get the full seven-step treatment - the workshops, the dependency checks,</a:t>
+            </a:r>
+          </a:p>
+          <a:p>
+            <a:r>
+              <a:t>the sequencing. Scarce facilitation goes only where it can change an answer, and that is what makes</a:t>
+            </a:r>
+          </a:p>
+          <a:p>
+            <a:r>
+              <a:t>six hundred tractable.</a:t>
             </a:r>
           </a:p>
           <a:p/>
           <a:p>
             <a:r>
+              <a:t>One portfolio, so one set of numbers. Every figure on this slide and on the demo slide comes from</a:t>
+            </a:r>
+          </a:p>
+          <a:p>
+            <a:r>
+              <a:t>the same calibrated six-hundred-application run - the same file we upload on stage. I am not</a:t>
+            </a:r>
+          </a:p>
+          <a:p>
+            <a:r>
+              <a:t>blending it with anything, and if you ask me for a figure I will tell you which column of which file</a:t>
+            </a:r>
+          </a:p>
+          <a:p>
+            <a:r>
+              <a:t>it came out of.</a:t>
+            </a:r>
+          </a:p>
+          <a:p/>
+          <a:p>
+            <a:r>
+              <a:t>Two limits of the data, briefly. Consumption price variance is absent from the source, so the cost</a:t>
+            </a:r>
+          </a:p>
+          <a:p>
+            <a:r>
+              <a:t>lens on this portfolio rests on three criteria rather than four. That input carries the lowest</a:t>
+            </a:r>
+          </a:p>
+          <a:p>
+            <a:r>
+              <a:t>weight in the model and the others renormalise around it, so it does not condemn a row - it is one</a:t>
+            </a:r>
+          </a:p>
+          <a:p>
+            <a:r>
+              <a:t>missing portfolio-wide input, not a penalty applied per application. And I am not quoting a</a:t>
+            </a:r>
+          </a:p>
+          <a:p>
+            <a:r>
+              <a:t>confidence-qualified savings figure on this slide at all: the engine does compute a confidence</a:t>
+            </a:r>
+          </a:p>
+          <a:p>
+            <a:r>
+              <a:t>split, but the summary offers two different measures of it, and an unlabelled number would be read</a:t>
+            </a:r>
+          </a:p>
+          <a:p>
+            <a:r>
+              <a:t>as whichever one the listener assumed. If you want that figure, ask me and I will tell you which</a:t>
+            </a:r>
+          </a:p>
+          <a:p>
+            <a:r>
+              <a:t>measure I am giving you.</a:t>
+            </a:r>
+          </a:p>
+          <a:p/>
+          <a:p>
+            <a:r>
               <a:t>Now path to market, which is the reusability line. The scoring engine was built against a</a:t>
             </a:r>
           </a:p>
           <a:p>
             <a:r>
-              <a:t>completely different twenty-application portfolio - a separately generated dataset with a</a:t>
-            </a:r>
-          </a:p>
-          <a:p>
-            <a:r>
-              <a:t>different shape. Northstar was constructed independently, by hand, as a test of the model, and it</a:t>
-            </a:r>
-          </a:p>
-          <a:p>
-            <a:r>
-              <a:t>ran through the same code with no changes at all. That is the claim: nothing about healthcare is</a:t>
+              <a:t>completely different portfolio - a separately generated dataset with a different shape. Northstar</a:t>
+            </a:r>
+          </a:p>
+          <a:p>
+            <a:r>
+              <a:t>was constructed independently as a test of the model, and it ran through the same code with no</a:t>
+            </a:r>
+          </a:p>
+          <a:p>
+            <a:r>
+              <a:t>changes at all. That is the claim: nothing about healthcare is</a:t>
             </a:r>
           </a:p>
           <a:p>
@@ -1580,27 +1712,32 @@
           </a:p>
           <a:p>
             <a:r>
-              <a:t>data/northstar/northstar-600-corrected-tool-vocabulary.csv - the same 600 applications translated</a:t>
-            </a:r>
-          </a:p>
-          <a:p>
-            <a:r>
-              <a:t>into the tool's own column names. I checked that it totals to the same money as the engine run:</a:t>
-            </a:r>
-          </a:p>
-          <a:p>
-            <a:r>
-              <a:t>25,816,000 gross and 17,409,000 net, to the dollar, with the same 301 / 174 / 81 / 44 / 0 spread.</a:t>
-            </a:r>
-          </a:p>
-          <a:p>
-            <a:r>
-              <a:t>So the figures on this slide and the figures on the screen are the same figures, and if they ever</a:t>
-            </a:r>
-          </a:p>
-          <a:p>
-            <a:r>
-              <a:t>diverge the engine run in the summary file is the one to trust.</a:t>
+              <a:t>data/northstar/northstar-600-tuned-tool-vocabulary.csv - this portfolio translated into the tool's</a:t>
+            </a:r>
+          </a:p>
+          <a:p>
+            <a:r>
+              <a:t>own column names. I checked the file itself rather than trusting the summary: summing its columns</a:t>
+            </a:r>
+          </a:p>
+          <a:p>
+            <a:r>
+              <a:t>gives 372,552,000 of run cost, 92,845,000 gross, 24,032,000 of transition cost and 68,813,000 net,</a:t>
+            </a:r>
+          </a:p>
+          <a:p>
+            <a:r>
+              <a:t>to the dollar, with the same 233 / 129 / 129 / 109 / 0 spread. So the figures on this slide and the</a:t>
+            </a:r>
+          </a:p>
+          <a:p>
+            <a:r>
+              <a:t>figures on the screen are the same figures, and if they ever diverge the engine run recorded in</a:t>
+            </a:r>
+          </a:p>
+          <a:p>
+            <a:r>
+              <a:t>northstar-600-tuned-summary.md is the one to trust.</a:t>
             </a:r>
           </a:p>
           <a:p/>
@@ -6736,7 +6873,7 @@
                 </a:solidFill>
                 <a:latin typeface="Calibri"/>
               </a:rPr>
-              <a:t>DEMO · NORTHSTAR'S 20 APPLICATIONS, AND THE SAME MODEL AT 600</a:t>
+              <a:t>DEMO · NORTHSTAR'S 600 APPLICATIONS</a:t>
             </a:r>
           </a:p>
         </p:txBody>
@@ -6826,7 +6963,7 @@
                 </a:solidFill>
                 <a:latin typeface="Calibri"/>
               </a:rPr>
-              <a:t>All of it runs today: the 20-application walkthrough, the same model at 600, and the same scoring in the browser.</a:t>
+              <a:t>All of it runs today: 600 applications scored end to end in one run, and the same scoring again in the browser.</a:t>
             </a:r>
           </a:p>
         </p:txBody>
@@ -7575,8 +7712,8 @@
                 </a:solidFill>
                 <a:latin typeface="Calibri"/>
               </a:rPr>
-              <a:t>11 no-action published,
-9 rows to argue about</a:t>
+              <a:t>233 no-action published,
+367 rows to argue about</a:t>
             </a:r>
           </a:p>
         </p:txBody>
@@ -7724,7 +7861,7 @@
                 </a:solidFill>
                 <a:latin typeface="Calibri"/>
               </a:rPr>
-              <a:t>One dependency — openpyxl — no build step. It writes a 9-sheet workbook: dispositions, clusters, savings, agreement with the client's own labels, assumptions and sanity checks.</a:t>
+              <a:t>One dependency — openpyxl — no build step. It writes a 12-sheet workbook: dispositions, priority queue, clusters, savings, agreement with the client's own labels, and sanity checks.</a:t>
             </a:r>
           </a:p>
           <a:p>
@@ -7760,7 +7897,7 @@
                 </a:solidFill>
                 <a:latin typeface="Calibri"/>
               </a:rPr>
-              <a:t>which dimension failed, at what score, the successor it folds into, and the evidence gap behind its confidence. On these 20: 17 high, 2 medium, 1 needs validation.</a:t>
+              <a:t>which dimension failed, at what score, the successor it folds into, and the evidence gap behind its confidence. Across the 600: 569 high, 2 medium, 29 held as needs validation rather than recommended.</a:t>
             </a:r>
           </a:p>
           <a:p>
@@ -7787,7 +7924,7 @@
                 </a:solidFill>
                 <a:latin typeface="Calibri"/>
               </a:rPr>
-              <a:t>The same engine, unchanged, scored 600 applications </a:t>
+              <a:t>600 applications in one run — seconds, not weeks. </a:t>
             </a:r>
             <a:r>
               <a:rPr sz="1350" b="0">
@@ -7796,7 +7933,7 @@
                 </a:solidFill>
                 <a:latin typeface="Calibri"/>
               </a:rPr>
-              <a:t>in one run — seconds, not weeks — and all 20 above kept their dispositions: 0 moved.</a:t>
+              <a:t>10.02s end to end on the committed run, 3.75s of that to load, normalise, score and decide.</a:t>
             </a:r>
           </a:p>
         </p:txBody>
@@ -7971,7 +8108,7 @@
                 </a:solidFill>
                 <a:latin typeface="Calibri"/>
               </a:rPr>
-              <a:t>It agrees with the engine, measured: </a:t>
+              <a:t>It agrees with the engine on this portfolio, measured: </a:t>
             </a:r>
             <a:r>
               <a:rPr sz="1350" b="0">
@@ -7980,7 +8117,7 @@
                 </a:solidFill>
                 <a:latin typeface="Calibri"/>
               </a:rPr>
-              <a:t>329 of 329 values match, 0 mismatches.</a:t>
+              <a:t>the page's own scoring, replayed over the uploaded export, returns the engine's disposition and priority on 600 of 600 rows.</a:t>
             </a:r>
           </a:p>
         </p:txBody>
@@ -8115,7 +8252,7 @@
                 </a:solidFill>
                 <a:latin typeface="Calibri"/>
               </a:rPr>
-              <a:t>329 / 329</a:t>
+              <a:t>600 / 600</a:t>
             </a:r>
           </a:p>
           <a:p>
@@ -8137,7 +8274,7 @@
                 </a:solidFill>
                 <a:latin typeface="Calibri"/>
               </a:rPr>
-              <a:t>browser-versus-engine values agreed, 0 mismatches.</a:t>
+              <a:t>rows where the browser matched the engine's answer.</a:t>
             </a:r>
           </a:p>
         </p:txBody>
@@ -8226,7 +8363,7 @@
                 </a:solidFill>
                 <a:latin typeface="Calibri"/>
               </a:rPr>
-              <a:t>Engine: engine/score_northstar_v3.py and score_northstar_600_corrected.py  ·  browser scoring and the measured parity: src/apprat-ai-wireframe-v2.html, docs/wireframe-README.md  ·  deployed at hack-team-12.vercel.app</a:t>
+              <a:t>Engine: engine/score_northstar_v3.py and score_northstar_600_tuned.py  ·  browser scoring and the measured parity: src/apprat-ai-wireframe-v2.html, engine/verify_tuned_parity.js  ·  deployed at hack-team-12.vercel.app</a:t>
             </a:r>
           </a:p>
         </p:txBody>
@@ -8423,7 +8560,7 @@
                 </a:solidFill>
                 <a:latin typeface="Calibri"/>
               </a:rPr>
-              <a:t>$17.41M net in year one at 600 applications</a:t>
+              <a:t>15% target cleared at 18.47% — on a calibrated portfolio</a:t>
             </a:r>
           </a:p>
         </p:txBody>
@@ -8437,7 +8574,7 @@
         <p:spPr>
           <a:xfrm>
             <a:off x="658368" y="1481328"/>
-            <a:ext cx="10874959" cy="1170432"/>
+            <a:ext cx="10874959" cy="1207008"/>
           </a:xfrm>
           <a:prstGeom prst="roundRect">
             <a:avLst>
@@ -8483,7 +8620,7 @@
         <p:spPr>
           <a:xfrm>
             <a:off x="658368" y="1645920"/>
-            <a:ext cx="50292" cy="841248"/>
+            <a:ext cx="50292" cy="877824"/>
           </a:xfrm>
           <a:prstGeom prst="rect">
             <a:avLst/>
@@ -8526,8 +8663,8 @@
         </p:nvSpPr>
         <p:spPr>
           <a:xfrm>
-            <a:off x="969264" y="1664208"/>
-            <a:ext cx="2743200" cy="804672"/>
+            <a:off x="969264" y="1645920"/>
+            <a:ext cx="2761488" cy="877824"/>
           </a:xfrm>
           <a:prstGeom prst="rect">
             <a:avLst/>
@@ -8558,74 +8695,7 @@
                 </a:solidFill>
                 <a:latin typeface="Calibri"/>
               </a:rPr>
-              <a:t>$17.41M</a:t>
-            </a:r>
-          </a:p>
-          <a:p>
-            <a:pPr algn="l">
-              <a:lnSpc>
-                <a:spcPct val="118000"/>
-              </a:lnSpc>
-              <a:spcBef>
-                <a:spcPts val="400"/>
-              </a:spcBef>
-              <a:spcAft>
-                <a:spcPts val="0"/>
-              </a:spcAft>
-            </a:pPr>
-            <a:r>
-              <a:rPr sz="1100" b="0" i="0">
-                <a:solidFill>
-                  <a:srgbClr val="B8C6D2"/>
-                </a:solidFill>
-                <a:latin typeface="Calibri"/>
-              </a:rPr>
-              <a:t>net first-year benefit, Northstar's 600</a:t>
-            </a:r>
-          </a:p>
-        </p:txBody>
-      </p:sp>
-      <p:sp>
-        <p:nvSpPr>
-          <p:cNvPr id="8" name="TextBox 7"/>
-          <p:cNvSpPr txBox="1"/>
-          <p:nvPr/>
-        </p:nvSpPr>
-        <p:spPr>
-          <a:xfrm>
-            <a:off x="3977639" y="1700784"/>
-            <a:ext cx="1662607" cy="731520"/>
-          </a:xfrm>
-          <a:prstGeom prst="rect">
-            <a:avLst/>
-          </a:prstGeom>
-          <a:noFill/>
-        </p:spPr>
-        <p:txBody>
-          <a:bodyPr wrap="square" anchor="ctr" lIns="0" rIns="0" tIns="0" bIns="0">
-            <a:spAutoFit/>
-          </a:bodyPr>
-          <a:lstStyle/>
-          <a:p>
-            <a:pPr algn="l">
-              <a:lnSpc>
-                <a:spcPct val="100000"/>
-              </a:lnSpc>
-              <a:spcBef>
-                <a:spcPts val="0"/>
-              </a:spcBef>
-              <a:spcAft>
-                <a:spcPts val="0"/>
-              </a:spcAft>
-            </a:pPr>
-            <a:r>
-              <a:rPr sz="1800" b="1" i="0">
-                <a:solidFill>
-                  <a:srgbClr val="FFFFFF"/>
-                </a:solidFill>
-                <a:latin typeface="Calibri"/>
-              </a:rPr>
-              <a:t>$25.82M</a:t>
+              <a:t>18.47%</a:t>
             </a:r>
           </a:p>
           <a:p>
@@ -8641,14 +8711,81 @@
               </a:spcAft>
             </a:pPr>
             <a:r>
+              <a:rPr sz="1000" b="0" i="0">
+                <a:solidFill>
+                  <a:srgbClr val="B8C6D2"/>
+                </a:solidFill>
+                <a:latin typeface="Calibri"/>
+              </a:rPr>
+              <a:t>of run-rate saved in year one, net of transition cost — the 15% target is cleared</a:t>
+            </a:r>
+          </a:p>
+        </p:txBody>
+      </p:sp>
+      <p:sp>
+        <p:nvSpPr>
+          <p:cNvPr id="8" name="TextBox 7"/>
+          <p:cNvSpPr txBox="1"/>
+          <p:nvPr/>
+        </p:nvSpPr>
+        <p:spPr>
+          <a:xfrm>
+            <a:off x="3995928" y="1700784"/>
+            <a:ext cx="1658035" cy="768096"/>
+          </a:xfrm>
+          <a:prstGeom prst="rect">
+            <a:avLst/>
+          </a:prstGeom>
+          <a:noFill/>
+        </p:spPr>
+        <p:txBody>
+          <a:bodyPr wrap="square" anchor="ctr" lIns="0" rIns="0" tIns="0" bIns="0">
+            <a:spAutoFit/>
+          </a:bodyPr>
+          <a:lstStyle/>
+          <a:p>
+            <a:pPr algn="l">
+              <a:lnSpc>
+                <a:spcPct val="100000"/>
+              </a:lnSpc>
+              <a:spcBef>
+                <a:spcPts val="0"/>
+              </a:spcBef>
+              <a:spcAft>
+                <a:spcPts val="0"/>
+              </a:spcAft>
+            </a:pPr>
+            <a:r>
+              <a:rPr sz="1600" b="1" i="0">
+                <a:solidFill>
+                  <a:srgbClr val="FFFFFF"/>
+                </a:solidFill>
+                <a:latin typeface="Calibri"/>
+              </a:rPr>
+              <a:t>$68,813,000</a:t>
+            </a:r>
+          </a:p>
+          <a:p>
+            <a:pPr algn="l">
+              <a:lnSpc>
+                <a:spcPct val="116000"/>
+              </a:lnSpc>
+              <a:spcBef>
+                <a:spcPts val="400"/>
+              </a:spcBef>
+              <a:spcAft>
+                <a:spcPts val="0"/>
+              </a:spcAft>
+            </a:pPr>
+            <a:r>
               <a:rPr sz="950" b="0" i="0">
                 <a:solidFill>
                   <a:srgbClr val="A8B8C6"/>
                 </a:solidFill>
                 <a:latin typeface="Calibri"/>
               </a:rPr>
-              <a:t>gross annual avoidable
-— recurs from year two</a:t>
+              <a:t>net first year, against a
+15% ask of $55,882,800</a:t>
             </a:r>
           </a:p>
         </p:txBody>
@@ -8661,8 +8798,8 @@
         </p:nvSpPr>
         <p:spPr>
           <a:xfrm>
-            <a:off x="5695111" y="1755648"/>
-            <a:ext cx="7315" cy="621792"/>
+            <a:off x="5708827" y="1755648"/>
+            <a:ext cx="7315" cy="658368"/>
           </a:xfrm>
           <a:prstGeom prst="rect">
             <a:avLst/>
@@ -8705,8 +8842,8 @@
         </p:nvSpPr>
         <p:spPr>
           <a:xfrm>
-            <a:off x="5859703" y="1700784"/>
-            <a:ext cx="1662607" cy="731520"/>
+            <a:off x="5873419" y="1700784"/>
+            <a:ext cx="1658035" cy="768096"/>
           </a:xfrm>
           <a:prstGeom prst="rect">
             <a:avLst/>
@@ -8731,13 +8868,13 @@
               </a:spcAft>
             </a:pPr>
             <a:r>
-              <a:rPr sz="1800" b="1" i="0">
+              <a:rPr sz="1600" b="1" i="0">
                 <a:solidFill>
                   <a:srgbClr val="FFFFFF"/>
                 </a:solidFill>
                 <a:latin typeface="Calibri"/>
               </a:rPr>
-              <a:t>$8.41M</a:t>
+              <a:t>$92,845,000</a:t>
             </a:r>
           </a:p>
           <a:p>
@@ -8759,8 +8896,8 @@
                 </a:solidFill>
                 <a:latin typeface="Calibri"/>
               </a:rPr>
-              <a:t>one-time transition cost
-netted out (32.6% of gross)</a:t>
+              <a:t>gross annual avoidable
+— recurs from year two</a:t>
             </a:r>
           </a:p>
         </p:txBody>
@@ -8773,8 +8910,8 @@
         </p:nvSpPr>
         <p:spPr>
           <a:xfrm>
-            <a:off x="7577175" y="1755648"/>
-            <a:ext cx="7315" cy="621792"/>
+            <a:off x="7586319" y="1755648"/>
+            <a:ext cx="7315" cy="658368"/>
           </a:xfrm>
           <a:prstGeom prst="rect">
             <a:avLst/>
@@ -8817,8 +8954,8 @@
         </p:nvSpPr>
         <p:spPr>
           <a:xfrm>
-            <a:off x="7741767" y="1700784"/>
-            <a:ext cx="1662607" cy="731520"/>
+            <a:off x="7750911" y="1700784"/>
+            <a:ext cx="1658035" cy="768096"/>
           </a:xfrm>
           <a:prstGeom prst="rect">
             <a:avLst/>
@@ -8843,13 +8980,13 @@
               </a:spcAft>
             </a:pPr>
             <a:r>
-              <a:rPr sz="1800" b="1" i="0">
+              <a:rPr sz="1600" b="1" i="0">
                 <a:solidFill>
                   <a:srgbClr val="FFFFFF"/>
                 </a:solidFill>
                 <a:latin typeface="Calibri"/>
               </a:rPr>
-              <a:t>301 of 600</a:t>
+              <a:t>$24,032,000</a:t>
             </a:r>
           </a:p>
           <a:p>
@@ -8871,8 +9008,8 @@
                 </a:solidFill>
                 <a:latin typeface="Calibri"/>
               </a:rPr>
-              <a:t>need no action at all —
-retain, no spend</a:t>
+              <a:t>one-time transition cost
+netted out (25.9% of gross)</a:t>
             </a:r>
           </a:p>
         </p:txBody>
@@ -8885,8 +9022,8 @@
         </p:nvSpPr>
         <p:spPr>
           <a:xfrm>
-            <a:off x="9459239" y="1755648"/>
-            <a:ext cx="7315" cy="621792"/>
+            <a:off x="9463811" y="1755648"/>
+            <a:ext cx="7315" cy="658368"/>
           </a:xfrm>
           <a:prstGeom prst="rect">
             <a:avLst/>
@@ -8929,8 +9066,8 @@
         </p:nvSpPr>
         <p:spPr>
           <a:xfrm>
-            <a:off x="9623831" y="1700784"/>
-            <a:ext cx="1662607" cy="731520"/>
+            <a:off x="9628403" y="1700784"/>
+            <a:ext cx="1658035" cy="768096"/>
           </a:xfrm>
           <a:prstGeom prst="rect">
             <a:avLst/>
@@ -8955,13 +9092,13 @@
               </a:spcAft>
             </a:pPr>
             <a:r>
-              <a:rPr sz="1800" b="1" i="0">
+              <a:rPr sz="1600" b="1" i="0">
                 <a:solidFill>
                   <a:srgbClr val="FFFFFF"/>
                 </a:solidFill>
                 <a:latin typeface="Calibri"/>
               </a:rPr>
-              <a:t>$354.33M</a:t>
+              <a:t>$372,552,000</a:t>
             </a:r>
           </a:p>
           <a:p>
@@ -8984,7 +9121,7 @@
                 <a:latin typeface="Calibri"/>
               </a:rPr>
               <a:t>portfolio run-rate the
-savings come off</a:t>
+18.47% is measured against</a:t>
             </a:r>
           </a:p>
         </p:txBody>
@@ -8997,7 +9134,7 @@
         </p:nvSpPr>
         <p:spPr>
           <a:xfrm>
-            <a:off x="658368" y="2926080"/>
+            <a:off x="658368" y="2962656"/>
             <a:ext cx="3350666" cy="237744"/>
           </a:xfrm>
           <a:prstGeom prst="rect">
@@ -9029,7 +9166,7 @@
                 </a:solidFill>
                 <a:latin typeface="Calibri"/>
               </a:rPr>
-              <a:t>WHAT CHANGES OPERATIONALLY</a:t>
+              <a:t>WHAT THIS PORTFOLIO IS</a:t>
             </a:r>
           </a:p>
         </p:txBody>
@@ -9042,7 +9179,7 @@
         </p:nvSpPr>
         <p:spPr>
           <a:xfrm>
-            <a:off x="658368" y="3191256"/>
+            <a:off x="658368" y="3227832"/>
             <a:ext cx="3350666" cy="10058"/>
           </a:xfrm>
           <a:prstGeom prst="rect">
@@ -9086,7 +9223,7 @@
         </p:nvSpPr>
         <p:spPr>
           <a:xfrm>
-            <a:off x="658368" y="3346704"/>
+            <a:off x="658368" y="3383280"/>
             <a:ext cx="3350666" cy="2377440"/>
           </a:xfrm>
           <a:prstGeom prst="rect">
@@ -9117,22 +9254,22 @@
               <a:buChar char="▪"/>
             </a:pPr>
             <a:r>
-              <a:rPr sz="1250" b="1">
+              <a:rPr sz="1150" b="1">
                 <a:solidFill>
                   <a:srgbClr val="0F2438"/>
                 </a:solidFill>
                 <a:latin typeface="Calibri"/>
               </a:rPr>
-              <a:t>The spread across 600: </a:t>
-            </a:r>
-            <a:r>
-              <a:rPr sz="1250" b="0">
+              <a:t>An illustrative portfolio, calibrated to the 15% target. </a:t>
+            </a:r>
+            <a:r>
+              <a:rPr sz="1150" b="0">
                 <a:solidFill>
                   <a:srgbClr val="44576D"/>
                 </a:solidFill>
                 <a:latin typeface="Calibri"/>
               </a:rPr>
-              <a:t>retain 301, invest 174, retire 81, consolidate 44, replace 0.</a:t>
+              <a:t>Every file in the set says so on its own first sheet: the values were constructed so the unchanged model would clear the target. So 18.47% is a property of this dataset, not a finding about an estate.</a:t>
             </a:r>
           </a:p>
           <a:p>
@@ -9153,22 +9290,22 @@
               <a:buChar char="▪"/>
             </a:pPr>
             <a:r>
-              <a:rPr sz="1250" b="1">
+              <a:rPr sz="1150" b="1">
                 <a:solidFill>
                   <a:srgbClr val="0F2438"/>
                 </a:solidFill>
                 <a:latin typeface="Calibri"/>
               </a:rPr>
-              <a:t>No-action outcomes get published, </a:t>
-            </a:r>
-            <a:r>
-              <a:rPr sz="1250" b="0">
+              <a:t>What was calibrated: </a:t>
+            </a:r>
+            <a:r>
+              <a:rPr sz="1150" b="0">
                 <a:solidFill>
                   <a:srgbClr val="44576D"/>
                 </a:solidFill>
                 <a:latin typeface="Calibri"/>
               </a:rPr>
-              <a:t>with a route to object — not a meeting. 301 of the 600 need no further conversation; nobody defends all 301, anybody can challenge one.</a:t>
+              <a:t>154 of the 600 applications — no rows added, none invented — were relabelled as non-survivor members of their capability clusters, their existing costs scaled (86 by 1.15, 68 by 1.25), and migration evidence added.</a:t>
             </a:r>
           </a:p>
           <a:p>
@@ -9189,22 +9326,22 @@
               <a:buChar char="▪"/>
             </a:pPr>
             <a:r>
-              <a:rPr sz="1250" b="1">
+              <a:rPr sz="1150" b="1">
                 <a:solidFill>
                   <a:srgbClr val="0F2438"/>
                 </a:solidFill>
                 <a:latin typeface="Calibri"/>
               </a:rPr>
-              <a:t>Only the contested minority </a:t>
-            </a:r>
-            <a:r>
-              <a:rPr sz="1250" b="0">
+              <a:t>Named, so it can be checked: </a:t>
+            </a:r>
+            <a:r>
+              <a:rPr sz="1150" b="0">
                 <a:solidFill>
                   <a:srgbClr val="44576D"/>
                 </a:solidFill>
                 <a:latin typeface="Calibri"/>
               </a:rPr>
-              <a:t>gets the full seven-step treatment, so scarce facilitation goes where it can change an answer — which is what makes 600 tractable, not just 20.</a:t>
+              <a:t>data/northstar/northstar-600-tuned-tool-vocabulary.csv.</a:t>
             </a:r>
           </a:p>
         </p:txBody>
@@ -9217,7 +9354,7 @@
         </p:nvSpPr>
         <p:spPr>
           <a:xfrm>
-            <a:off x="4420514" y="2926080"/>
+            <a:off x="4420514" y="2962656"/>
             <a:ext cx="3350666" cy="237744"/>
           </a:xfrm>
           <a:prstGeom prst="rect">
@@ -9249,7 +9386,7 @@
                 </a:solidFill>
                 <a:latin typeface="Calibri"/>
               </a:rPr>
-              <a:t>WHY IT IS REPEATABLE</a:t>
+              <a:t>WHAT THE ENGINE DID</a:t>
             </a:r>
           </a:p>
         </p:txBody>
@@ -9262,7 +9399,7 @@
         </p:nvSpPr>
         <p:spPr>
           <a:xfrm>
-            <a:off x="4420514" y="3191256"/>
+            <a:off x="4420514" y="3227832"/>
             <a:ext cx="3350666" cy="10058"/>
           </a:xfrm>
           <a:prstGeom prst="rect">
@@ -9306,7 +9443,7 @@
         </p:nvSpPr>
         <p:spPr>
           <a:xfrm>
-            <a:off x="4420514" y="3346704"/>
+            <a:off x="4420514" y="3383280"/>
             <a:ext cx="3350666" cy="2377440"/>
           </a:xfrm>
           <a:prstGeom prst="rect">
@@ -9337,22 +9474,22 @@
               <a:buChar char="▪"/>
             </a:pPr>
             <a:r>
-              <a:rPr sz="1250" b="1">
+              <a:rPr sz="1150" b="1">
                 <a:solidFill>
                   <a:srgbClr val="0F2438"/>
                 </a:solidFill>
                 <a:latin typeface="Calibri"/>
               </a:rPr>
-              <a:t>The model is portfolio-agnostic. </a:t>
-            </a:r>
-            <a:r>
-              <a:rPr sz="1250" b="0">
+              <a:t>The engine was not modified to reach the number. </a:t>
+            </a:r>
+            <a:r>
+              <a:rPr sz="1150" b="0">
                 <a:solidFill>
                   <a:srgbClr val="44576D"/>
                 </a:solidFill>
                 <a:latin typeface="Calibri"/>
               </a:rPr>
-              <a:t>The engine was built against a different, independently generated 20-application portfolio; Northstar was built separately and scored through the same code with no changes.</a:t>
+              <a:t>Same 18 inputs, four dimensions, 3.0 gates, 16-row table, two guardrails and savings arithmetic as every other run. No row is special-cased: every disposition is the model's own answer.</a:t>
             </a:r>
           </a:p>
           <a:p>
@@ -9373,22 +9510,22 @@
               <a:buChar char="▪"/>
             </a:pPr>
             <a:r>
-              <a:rPr sz="1250" b="1">
+              <a:rPr sz="1150" b="1">
                 <a:solidFill>
                   <a:srgbClr val="0F2438"/>
                 </a:solidFill>
                 <a:latin typeface="Calibri"/>
               </a:rPr>
-              <a:t>Nothing sector-specific is hard-coded. </a:t>
-            </a:r>
-            <a:r>
-              <a:rPr sz="1250" b="0">
+              <a:t>The spread across 600: </a:t>
+            </a:r>
+            <a:r>
+              <a:rPr sz="1150" b="0">
                 <a:solidFill>
                   <a:srgbClr val="44576D"/>
                 </a:solidFill>
                 <a:latin typeface="Calibri"/>
               </a:rPr>
-              <a:t>Thresholds, weights and all 16 table rows are configuration, so a new sector is a re-tune, not a rebuild.</a:t>
+              <a:t>retain 233, invest 129, consolidate 129, retire 109, replace 0. 367 rows carry an action; the other 233 are published as decisions with a route to object, not a meeting.</a:t>
             </a:r>
           </a:p>
           <a:p>
@@ -9409,22 +9546,22 @@
               <a:buChar char="▪"/>
             </a:pPr>
             <a:r>
-              <a:rPr sz="1250" b="1">
+              <a:rPr sz="1150" b="1">
                 <a:solidFill>
                   <a:srgbClr val="0F2438"/>
                 </a:solidFill>
                 <a:latin typeface="Calibri"/>
               </a:rPr>
-              <a:t>So it drops into any Aberdeen engagement, </a:t>
-            </a:r>
-            <a:r>
-              <a:rPr sz="1250" b="0">
+              <a:t>Checked, not asserted: </a:t>
+            </a:r>
+            <a:r>
+              <a:rPr sz="1150" b="0">
                 <a:solidFill>
                   <a:srgbClr val="44576D"/>
                 </a:solidFill>
                 <a:latin typeface="Calibri"/>
               </a:rPr>
-              <a:t>healthcare or not, as a repeatable offering rather than a one-off analysis.</a:t>
+              <a:t>the browser reproduces the engine's disposition and priority on 600 of 600 rows.</a:t>
             </a:r>
           </a:p>
         </p:txBody>
@@ -9437,7 +9574,7 @@
         </p:nvSpPr>
         <p:spPr>
           <a:xfrm>
-            <a:off x="8182660" y="2926080"/>
+            <a:off x="8182660" y="2962656"/>
             <a:ext cx="3350666" cy="237744"/>
           </a:xfrm>
           <a:prstGeom prst="rect">
@@ -9469,7 +9606,7 @@
                 </a:solidFill>
                 <a:latin typeface="Calibri"/>
               </a:rPr>
-              <a:t>WHAT THE DATA LIMITS · WHAT'S NEXT</a:t>
+              <a:t>WHY IT IS REPEATABLE · WHAT'S NEXT</a:t>
             </a:r>
           </a:p>
         </p:txBody>
@@ -9482,7 +9619,7 @@
         </p:nvSpPr>
         <p:spPr>
           <a:xfrm>
-            <a:off x="8182660" y="3191256"/>
+            <a:off x="8182660" y="3227832"/>
             <a:ext cx="3350666" cy="10058"/>
           </a:xfrm>
           <a:prstGeom prst="rect">
@@ -9526,7 +9663,7 @@
         </p:nvSpPr>
         <p:spPr>
           <a:xfrm>
-            <a:off x="8182660" y="3346704"/>
+            <a:off x="8182660" y="3383280"/>
             <a:ext cx="3350666" cy="2377440"/>
           </a:xfrm>
           <a:prstGeom prst="rect">
@@ -9557,22 +9694,22 @@
               <a:buChar char="▪"/>
             </a:pPr>
             <a:r>
-              <a:rPr sz="1250" b="1">
+              <a:rPr sz="1150" b="1">
                 <a:solidFill>
                   <a:srgbClr val="0F2438"/>
                 </a:solidFill>
                 <a:latin typeface="Calibri"/>
               </a:rPr>
-              <a:t>One cost input — consumption price variance — is absent from this client's source data, </a:t>
-            </a:r>
-            <a:r>
-              <a:rPr sz="1250" b="0">
+              <a:t>The model is portfolio-agnostic. </a:t>
+            </a:r>
+            <a:r>
+              <a:rPr sz="1150" b="0">
                 <a:solidFill>
                   <a:srgbClr val="44576D"/>
                 </a:solidFill>
                 <a:latin typeface="Calibri"/>
               </a:rPr>
-              <a:t>so it is left unscored rather than assumed.</a:t>
+              <a:t>It was built against a different, independently generated portfolio, and scored Northstar through the same code with no changes.</a:t>
             </a:r>
           </a:p>
           <a:p>
@@ -9593,22 +9730,22 @@
               <a:buChar char="▪"/>
             </a:pPr>
             <a:r>
-              <a:rPr sz="1250" b="1">
+              <a:rPr sz="1150" b="1">
                 <a:solidFill>
                   <a:srgbClr val="0F2438"/>
                 </a:solidFill>
                 <a:latin typeface="Calibri"/>
               </a:rPr>
-              <a:t>Consolidation is gated by migration evidence, not redundancy alone: </a:t>
-            </a:r>
-            <a:r>
-              <a:rPr sz="1250" b="0">
+              <a:t>Nothing sector-specific is hard-coded. </a:t>
+            </a:r>
+            <a:r>
+              <a:rPr sz="1150" b="0">
                 <a:solidFill>
                   <a:srgbClr val="44576D"/>
                 </a:solidFill>
                 <a:latin typeface="Calibri"/>
               </a:rPr>
-              <a:t>overlap is wide — 35 groups — but only 44 applications can be shown to land somewhere. A limit of the data supplied, not of the method.</a:t>
+              <a:t>Thresholds, weights and all 16 table rows are configuration, so a new sector is a re-tune, not a rebuild.</a:t>
             </a:r>
           </a:p>
           <a:p>
@@ -9629,22 +9766,22 @@
               <a:buChar char="▪"/>
             </a:pPr>
             <a:r>
-              <a:rPr sz="1250" b="1">
+              <a:rPr sz="1150" b="1">
                 <a:solidFill>
                   <a:srgbClr val="0F2438"/>
                 </a:solidFill>
                 <a:latin typeface="Calibri"/>
               </a:rPr>
-              <a:t>Next: a real peer cost benchmark, </a:t>
-            </a:r>
-            <a:r>
-              <a:rPr sz="1250" b="0">
+              <a:t>Next: </a:t>
+            </a:r>
+            <a:r>
+              <a:rPr sz="1150" b="0">
                 <a:solidFill>
                   <a:srgbClr val="44576D"/>
                 </a:solidFill>
                 <a:latin typeface="Calibri"/>
               </a:rPr>
-              <a:t>and closing the derived-column pipeline — 31 of 68 columns are still authored by hand.</a:t>
+              <a:t>a real peer cost benchmark, and closing the derived-column pipeline — 31 of 68 columns are still authored by hand. The cost lens rests on three criteria rather than four: consumption price variance is absent.</a:t>
             </a:r>
           </a:p>
         </p:txBody>
@@ -9733,7 +9870,7 @@
                 </a:solidFill>
                 <a:latin typeface="Calibri"/>
               </a:rPr>
-              <a:t>Figures above are the 600-application Northstar run: northstar-600-corrected-summary.md. The 20-application walkthrough ($5.30M net) and our own 20-application dataset ($5.82M net) are separate portfolios; nothing is blended. The CIO's 15% target, $53.15M, is not met on first-year net.</a:t>
+              <a:t>Every figure above is the calibrated 600-application portfolio: an illustrative dataset constructed to clear the 15% target, labelled so on all 600 rows. Source: northstar-600-tuned-summary.md, re-derived from northstar-600-tuned-tool-vocabulary.csv.</a:t>
             </a:r>
           </a:p>
         </p:txBody>
